--- a/system-design-101/vi/lessons/sd-13-027/slides/sd-13-027.pptx
+++ b/system-design-101/vi/lessons/sd-13-027/slides/sd-13-027.pptx
@@ -1794,8 +1794,8 @@
         </p:nvSpPr>
         <p:spPr>
           <a:xfrm>
-            <a:off x="914400" y="1524000"/>
-            <a:ext cx="8191500" cy="4191000"/>
+            <a:off x="914400" y="1333500"/>
+            <a:ext cx="8191500" cy="6096000"/>
           </a:xfrm>
           <a:prstGeom prst="rect">
             <a:avLst/>
@@ -1804,17 +1804,17 @@
           <a:ln/>
         </p:spPr>
         <p:txBody>
-          <a:bodyPr wrap="square" lIns="0" tIns="52006" rIns="0" bIns="-52006" rtlCol="0" anchor="t"/>
+          <a:bodyPr wrap="square" lIns="0" tIns="66866" rIns="0" bIns="-66866" rtlCol="0" anchor="t"/>
           <a:lstStyle/>
           <a:p>
             <a:pPr algn="l" indent="0" marL="0">
               <a:lnSpc>
-                <a:spcPts val="6678"/>
+                <a:spcPts val="8586"/>
               </a:lnSpc>
               <a:buNone/>
             </a:pPr>
             <a:r>
-              <a:rPr lang="en-US" sz="6300" dirty="0" spc="1" kern="0">
+              <a:rPr lang="en-US" sz="8100" dirty="0" spc="2" kern="0">
                 <a:solidFill>
                   <a:srgbClr val="F3EEE3"/>
                 </a:solidFill>
@@ -1825,7 +1825,7 @@
               <a:t>Thiết</a:t>
             </a:r>
             <a:r>
-              <a:rPr lang="en-US" sz="6300" dirty="0" spc="-50" kern="0">
+              <a:rPr lang="en-US" sz="8100" dirty="0" spc="-67" kern="0">
                 <a:solidFill>
                   <a:srgbClr val="F3EEE3"/>
                 </a:solidFill>
@@ -1836,7 +1836,7 @@
               <a:t> kế</a:t>
             </a:r>
             <a:r>
-              <a:rPr lang="en-US" sz="6300" dirty="0" spc="3" kern="0">
+              <a:rPr lang="en-US" sz="8100" dirty="0" spc="2" kern="0">
                 <a:solidFill>
                   <a:srgbClr val="F3EEE3"/>
                 </a:solidFill>
@@ -1847,7 +1847,7 @@
               <a:t> pipeline</a:t>
             </a:r>
             <a:r>
-              <a:rPr lang="en-US" sz="6300" dirty="0" spc="-27" kern="0">
+              <a:rPr lang="en-US" sz="8100" dirty="0" spc="-36" kern="0">
                 <a:solidFill>
                   <a:srgbClr val="F3EEE3"/>
                 </a:solidFill>
@@ -1858,7 +1858,7 @@
               <a:t> CI/CD</a:t>
             </a:r>
             <a:r>
-              <a:rPr lang="en-US" sz="6300" dirty="0" spc="1" kern="0">
+              <a:rPr lang="en-US" sz="8100" dirty="0" spc="1" kern="0">
                 <a:solidFill>
                   <a:srgbClr val="F3EEE3"/>
                 </a:solidFill>
@@ -1869,7 +1869,7 @@
               <a:t> cho</a:t>
             </a:r>
             <a:r>
-              <a:rPr lang="en-US" sz="6300" dirty="0" spc="-7" kern="0">
+              <a:rPr lang="en-US" sz="8100" dirty="0" spc="-10" kern="0">
                 <a:solidFill>
                   <a:srgbClr val="F3EEE3"/>
                 </a:solidFill>
@@ -1880,7 +1880,7 @@
               <a:t> một</a:t>
             </a:r>
             <a:r>
-              <a:rPr lang="en-US" sz="6300" dirty="0" spc="-13" kern="0">
+              <a:rPr lang="en-US" sz="8100" dirty="0" spc="-16" kern="0">
                 <a:solidFill>
                   <a:srgbClr val="F3EEE3"/>
                 </a:solidFill>
@@ -1891,7 +1891,7 @@
               <a:t> repo:</a:t>
             </a:r>
             <a:r>
-              <a:rPr lang="en-US" sz="6300" dirty="0" spc="3" kern="0">
+              <a:rPr lang="en-US" sz="8100" dirty="0" spc="1" kern="0">
                 <a:solidFill>
                   <a:srgbClr val="F3EEE3"/>
                 </a:solidFill>
@@ -1899,10 +1899,10 @@
                 <a:ea typeface="Bricolage Grotesque ExtraBold" pitchFamily="34" charset="-122"/>
                 <a:cs typeface="Bricolage Grotesque ExtraBold" pitchFamily="34" charset="-120"/>
               </a:rPr>
-              <a:t> năm</a:t>
-            </a:r>
-            <a:r>
-              <a:rPr lang="en-US" sz="6300" dirty="0" spc="0" kern="0">
+              <a:t> năm quyết</a:t>
+            </a:r>
+            <a:r>
+              <a:rPr lang="en-US" sz="8100" dirty="0" spc="24" kern="0">
                 <a:solidFill>
                   <a:srgbClr val="F3EEE3"/>
                 </a:solidFill>
@@ -1910,20 +1910,9 @@
                 <a:ea typeface="Bricolage Grotesque ExtraBold" pitchFamily="34" charset="-122"/>
                 <a:cs typeface="Bricolage Grotesque ExtraBold" pitchFamily="34" charset="-120"/>
               </a:rPr>
-              <a:t> quyết</a:t>
-            </a:r>
-            <a:r>
-              <a:rPr lang="en-US" sz="6300" dirty="0" spc="23" kern="0">
-                <a:solidFill>
-                  <a:srgbClr val="F3EEE3"/>
-                </a:solidFill>
-                <a:latin typeface="Bricolage Grotesque ExtraBold" pitchFamily="34" charset="0"/>
-                <a:ea typeface="Bricolage Grotesque ExtraBold" pitchFamily="34" charset="-122"/>
-                <a:cs typeface="Bricolage Grotesque ExtraBold" pitchFamily="34" charset="-120"/>
-              </a:rPr>
               <a:t> định</a:t>
             </a:r>
-            <a:endParaRPr lang="en-US" sz="6300" dirty="0"/>
+            <a:endParaRPr lang="en-US" sz="8100" dirty="0"/>
           </a:p>
         </p:txBody>
       </p:sp>
@@ -1935,7 +1924,7 @@
         </p:nvSpPr>
         <p:spPr>
           <a:xfrm>
-            <a:off x="914400" y="6286500"/>
+            <a:off x="914400" y="7620000"/>
             <a:ext cx="8191500" cy="1047750"/>
           </a:xfrm>
           <a:prstGeom prst="rect">
@@ -2115,7 +2104,7 @@
               <a:t> nhóm</a:t>
             </a:r>
             <a:r>
-              <a:rPr lang="en-US" sz="1650" dirty="0" spc="-3" kern="0">
+              <a:rPr lang="en-US" sz="1650" dirty="0" spc="-4" kern="0">
                 <a:solidFill>
                   <a:srgbClr val="9AA0B5"/>
                 </a:solidFill>
@@ -2123,10 +2112,10 @@
                 <a:ea typeface="Be Vietnam Pro" pitchFamily="34" charset="-122"/>
                 <a:cs typeface="Be Vietnam Pro" pitchFamily="34" charset="-120"/>
               </a:rPr>
-              <a:t> Quan</a:t>
-            </a:r>
-            <a:r>
-              <a:rPr lang="en-US" sz="1650" dirty="0" spc="-9" kern="0">
+              <a:t> DevOps</a:t>
+            </a:r>
+            <a:r>
+              <a:rPr lang="en-US" sz="1650" dirty="0" spc="-7" kern="0">
                 <a:solidFill>
                   <a:srgbClr val="9AA0B5"/>
                 </a:solidFill>
@@ -2134,7 +2123,7 @@
                 <a:ea typeface="Be Vietnam Pro" pitchFamily="34" charset="-122"/>
                 <a:cs typeface="Be Vietnam Pro" pitchFamily="34" charset="-120"/>
               </a:rPr>
-              <a:t> sát</a:t>
+              <a:t> và</a:t>
             </a:r>
             <a:r>
               <a:rPr lang="en-US" sz="1650" dirty="0" spc="3" kern="0">
@@ -2145,18 +2134,7 @@
                 <a:ea typeface="Be Vietnam Pro" pitchFamily="34" charset="-122"/>
                 <a:cs typeface="Be Vietnam Pro" pitchFamily="34" charset="-120"/>
               </a:rPr>
-              <a:t> hệ</a:t>
-            </a:r>
-            <a:r>
-              <a:rPr lang="en-US" sz="1650" dirty="0" spc="1" kern="0">
-                <a:solidFill>
-                  <a:srgbClr val="9AA0B5"/>
-                </a:solidFill>
-                <a:latin typeface="Be Vietnam Pro" pitchFamily="34" charset="0"/>
-                <a:ea typeface="Be Vietnam Pro" pitchFamily="34" charset="-122"/>
-                <a:cs typeface="Be Vietnam Pro" pitchFamily="34" charset="-120"/>
-              </a:rPr>
-              <a:t> thống</a:t>
+              <a:t> CI/CD</a:t>
             </a:r>
             <a:endParaRPr lang="en-US" sz="1650" dirty="0"/>
           </a:p>
@@ -3032,8 +3010,8 @@
         </p:nvSpPr>
         <p:spPr>
           <a:xfrm>
-            <a:off x="914400" y="1238250"/>
-            <a:ext cx="16192500" cy="857250"/>
+            <a:off x="914400" y="1219200"/>
+            <a:ext cx="16459200" cy="1047750"/>
           </a:xfrm>
           <a:prstGeom prst="rect">
             <a:avLst/>
@@ -3042,17 +3020,17 @@
           <a:ln/>
         </p:spPr>
         <p:txBody>
-          <a:bodyPr wrap="square" lIns="0" tIns="28575" rIns="0" bIns="-28575" rtlCol="0" anchor="t"/>
+          <a:bodyPr wrap="square" lIns="0" tIns="43815" rIns="0" bIns="-43815" rtlCol="0" anchor="t"/>
           <a:lstStyle/>
           <a:p>
             <a:pPr algn="l" indent="0" marL="0">
               <a:lnSpc>
-                <a:spcPts val="4950"/>
+                <a:spcPts val="7590"/>
               </a:lnSpc>
               <a:buNone/>
             </a:pPr>
             <a:r>
-              <a:rPr lang="en-US" sz="4500" dirty="0" spc="0" kern="0">
+              <a:rPr lang="en-US" sz="6900" dirty="0" spc="-2" kern="0">
                 <a:solidFill>
                   <a:srgbClr val="F3EEE3"/>
                 </a:solidFill>
@@ -3063,7 +3041,7 @@
               <a:t>Năm</a:t>
             </a:r>
             <a:r>
-              <a:rPr lang="en-US" sz="4500" dirty="0" spc="1" kern="0">
+              <a:rPr lang="en-US" sz="6900" dirty="0" spc="-1" kern="0">
                 <a:solidFill>
                   <a:srgbClr val="F3EEE3"/>
                 </a:solidFill>
@@ -3074,7 +3052,7 @@
               <a:t> từ</a:t>
             </a:r>
             <a:r>
-              <a:rPr lang="en-US" sz="4500" dirty="0" spc="3" kern="0">
+              <a:rPr lang="en-US" sz="6900" dirty="0" spc="1" kern="0">
                 <a:solidFill>
                   <a:srgbClr val="F3EEE3"/>
                 </a:solidFill>
@@ -3085,7 +3063,7 @@
               <a:t> viết</a:t>
             </a:r>
             <a:r>
-              <a:rPr lang="en-US" sz="4500" dirty="0" spc="1" kern="0">
+              <a:rPr lang="en-US" sz="6900" dirty="0" spc="-5" kern="0">
                 <a:solidFill>
                   <a:srgbClr val="F3EEE3"/>
                 </a:solidFill>
@@ -3096,7 +3074,7 @@
               <a:t> tắt</a:t>
             </a:r>
             <a:r>
-              <a:rPr lang="en-US" sz="4500" dirty="0" spc="-8" kern="0">
+              <a:rPr lang="en-US" sz="6900" dirty="0" spc="-13" kern="0">
                 <a:solidFill>
                   <a:srgbClr val="F3EEE3"/>
                 </a:solidFill>
@@ -3107,7 +3085,7 @@
               <a:t> trong</a:t>
             </a:r>
             <a:r>
-              <a:rPr lang="en-US" sz="4500" dirty="0" spc="2" kern="0">
+              <a:rPr lang="en-US" sz="6900" dirty="0" spc="-4" kern="0">
                 <a:solidFill>
                   <a:srgbClr val="F3EEE3"/>
                 </a:solidFill>
@@ -3117,7 +3095,7 @@
               </a:rPr>
               <a:t> bài</a:t>
             </a:r>
-            <a:endParaRPr lang="en-US" sz="4500" dirty="0"/>
+            <a:endParaRPr lang="en-US" sz="6900" dirty="0"/>
           </a:p>
         </p:txBody>
       </p:sp>
@@ -5814,8 +5792,8 @@
         </p:nvSpPr>
         <p:spPr>
           <a:xfrm>
-            <a:off x="914400" y="1238250"/>
-            <a:ext cx="16192500" cy="857250"/>
+            <a:off x="914400" y="1219200"/>
+            <a:ext cx="16459200" cy="1047750"/>
           </a:xfrm>
           <a:prstGeom prst="rect">
             <a:avLst/>
@@ -5824,17 +5802,17 @@
           <a:ln/>
         </p:spPr>
         <p:txBody>
-          <a:bodyPr wrap="square" lIns="0" tIns="28575" rIns="0" bIns="-28575" rtlCol="0" anchor="t"/>
+          <a:bodyPr wrap="square" lIns="0" tIns="43815" rIns="0" bIns="-43815" rtlCol="0" anchor="t"/>
           <a:lstStyle/>
           <a:p>
             <a:pPr algn="l" indent="0" marL="0">
               <a:lnSpc>
-                <a:spcPts val="4950"/>
+                <a:spcPts val="7590"/>
               </a:lnSpc>
               <a:buNone/>
             </a:pPr>
             <a:r>
-              <a:rPr lang="en-US" sz="4500" dirty="0" spc="11" kern="0">
+              <a:rPr lang="en-US" sz="6900" dirty="0" spc="6" kern="0">
                 <a:solidFill>
                   <a:srgbClr val="F3EEE3"/>
                 </a:solidFill>
@@ -5842,10 +5820,10 @@
                 <a:ea typeface="Bricolage Grotesque ExtraBold" pitchFamily="34" charset="-122"/>
                 <a:cs typeface="Bricolage Grotesque ExtraBold" pitchFamily="34" charset="-120"/>
               </a:rPr>
-              <a:t>PR,</a:t>
-            </a:r>
-            <a:r>
-              <a:rPr lang="en-US" sz="4500" dirty="0" spc="5" kern="0">
+              <a:t>PR</a:t>
+            </a:r>
+            <a:r>
+              <a:rPr lang="en-US" sz="6900" dirty="0" spc="-1" kern="0">
                 <a:solidFill>
                   <a:srgbClr val="F3EEE3"/>
                 </a:solidFill>
@@ -5853,10 +5831,10 @@
                 <a:ea typeface="Bricolage Grotesque ExtraBold" pitchFamily="34" charset="-122"/>
                 <a:cs typeface="Bricolage Grotesque ExtraBold" pitchFamily="34" charset="-120"/>
               </a:rPr>
-              <a:t> nhánh</a:t>
-            </a:r>
-            <a:r>
-              <a:rPr lang="en-US" sz="4500" dirty="0" spc="2" kern="0">
+              <a:t> khác</a:t>
+            </a:r>
+            <a:r>
+              <a:rPr lang="en-US" sz="6900" dirty="0" spc="3" kern="0">
                 <a:solidFill>
                   <a:srgbClr val="F3EEE3"/>
                 </a:solidFill>
@@ -5864,10 +5842,10 @@
                 <a:ea typeface="Bricolage Grotesque ExtraBold" pitchFamily="34" charset="-122"/>
                 <a:cs typeface="Bricolage Grotesque ExtraBold" pitchFamily="34" charset="-120"/>
               </a:rPr>
-              <a:t> chính</a:t>
-            </a:r>
-            <a:r>
-              <a:rPr lang="en-US" sz="4500" dirty="0" spc="-46" kern="0">
+              <a:t> nhánh</a:t>
+            </a:r>
+            <a:r>
+              <a:rPr lang="en-US" sz="6900" dirty="0" spc="1" kern="0">
                 <a:solidFill>
                   <a:srgbClr val="F3EEE3"/>
                 </a:solidFill>
@@ -5875,10 +5853,10 @@
                 <a:ea typeface="Bricolage Grotesque ExtraBold" pitchFamily="34" charset="-122"/>
                 <a:cs typeface="Bricolage Grotesque ExtraBold" pitchFamily="34" charset="-120"/>
               </a:rPr>
-              <a:t> và</a:t>
-            </a:r>
-            <a:r>
-              <a:rPr lang="en-US" sz="4500" dirty="0" spc="-1" kern="0">
+              <a:t> chính</a:t>
+            </a:r>
+            <a:r>
+              <a:rPr lang="en-US" sz="6900" dirty="0" spc="-77" kern="0">
                 <a:solidFill>
                   <a:srgbClr val="F3EEE3"/>
                 </a:solidFill>
@@ -5886,10 +5864,10 @@
                 <a:ea typeface="Bricolage Grotesque ExtraBold" pitchFamily="34" charset="-122"/>
                 <a:cs typeface="Bricolage Grotesque ExtraBold" pitchFamily="34" charset="-120"/>
               </a:rPr>
-              <a:t> tag</a:t>
-            </a:r>
-            <a:r>
-              <a:rPr lang="en-US" sz="4500" dirty="0" spc="3" kern="0">
+              <a:t> và</a:t>
+            </a:r>
+            <a:r>
+              <a:rPr lang="en-US" sz="6900" dirty="0" spc="-5" kern="0">
                 <a:solidFill>
                   <a:srgbClr val="F3EEE3"/>
                 </a:solidFill>
@@ -5897,31 +5875,9 @@
                 <a:ea typeface="Bricolage Grotesque ExtraBold" pitchFamily="34" charset="-122"/>
                 <a:cs typeface="Bricolage Grotesque ExtraBold" pitchFamily="34" charset="-120"/>
               </a:rPr>
-              <a:t> chạy</a:t>
-            </a:r>
-            <a:r>
-              <a:rPr lang="en-US" sz="4500" dirty="0" spc="1" kern="0">
-                <a:solidFill>
-                  <a:srgbClr val="F3EEE3"/>
-                </a:solidFill>
-                <a:latin typeface="Bricolage Grotesque ExtraBold" pitchFamily="34" charset="0"/>
-                <a:ea typeface="Bricolage Grotesque ExtraBold" pitchFamily="34" charset="-122"/>
-                <a:cs typeface="Bricolage Grotesque ExtraBold" pitchFamily="34" charset="-120"/>
-              </a:rPr>
-              <a:t> việc</a:t>
-            </a:r>
-            <a:r>
-              <a:rPr lang="en-US" sz="4500" dirty="0" spc="3" kern="0">
-                <a:solidFill>
-                  <a:srgbClr val="F3EEE3"/>
-                </a:solidFill>
-                <a:latin typeface="Bricolage Grotesque ExtraBold" pitchFamily="34" charset="0"/>
-                <a:ea typeface="Bricolage Grotesque ExtraBold" pitchFamily="34" charset="-122"/>
-                <a:cs typeface="Bricolage Grotesque ExtraBold" pitchFamily="34" charset="-120"/>
-              </a:rPr>
-              <a:t> khác nhau</a:t>
-            </a:r>
-            <a:endParaRPr lang="en-US" sz="4500" dirty="0"/>
+              <a:t> tag</a:t>
+            </a:r>
+            <a:endParaRPr lang="en-US" sz="6900" dirty="0"/>
           </a:p>
         </p:txBody>
       </p:sp>
@@ -7397,8 +7353,8 @@
         </p:nvSpPr>
         <p:spPr>
           <a:xfrm>
-            <a:off x="914400" y="1238250"/>
-            <a:ext cx="16192500" cy="857250"/>
+            <a:off x="914400" y="1219200"/>
+            <a:ext cx="16459200" cy="1047750"/>
           </a:xfrm>
           <a:prstGeom prst="rect">
             <a:avLst/>
@@ -7407,17 +7363,17 @@
           <a:ln/>
         </p:spPr>
         <p:txBody>
-          <a:bodyPr wrap="square" lIns="0" tIns="28575" rIns="0" bIns="-28575" rtlCol="0" anchor="t"/>
+          <a:bodyPr wrap="square" lIns="0" tIns="43815" rIns="0" bIns="-43815" rtlCol="0" anchor="t"/>
           <a:lstStyle/>
           <a:p>
             <a:pPr algn="l" indent="0" marL="0">
               <a:lnSpc>
-                <a:spcPts val="4950"/>
+                <a:spcPts val="7590"/>
               </a:lnSpc>
               <a:buNone/>
             </a:pPr>
             <a:r>
-              <a:rPr lang="en-US" sz="4500" dirty="0" spc="6" kern="0">
+              <a:rPr lang="en-US" sz="6900" dirty="0" spc="9" kern="0">
                 <a:solidFill>
                   <a:srgbClr val="14161C"/>
                 </a:solidFill>
@@ -7428,7 +7384,7 @@
               <a:t>Quyền</a:t>
             </a:r>
             <a:r>
-              <a:rPr lang="en-US" sz="4500" dirty="0" spc="-15" kern="0">
+              <a:rPr lang="en-US" sz="6900" dirty="0" spc="-26" kern="0">
                 <a:solidFill>
                   <a:srgbClr val="14161C"/>
                 </a:solidFill>
@@ -7439,7 +7395,7 @@
               <a:t> tối</a:t>
             </a:r>
             <a:r>
-              <a:rPr lang="en-US" sz="4500" dirty="0" spc="3" kern="0">
+              <a:rPr lang="en-US" sz="6900" dirty="0" spc="6" kern="0">
                 <a:solidFill>
                   <a:srgbClr val="14161C"/>
                 </a:solidFill>
@@ -7447,10 +7403,10 @@
                 <a:ea typeface="Bricolage Grotesque ExtraBold" pitchFamily="34" charset="-122"/>
                 <a:cs typeface="Bricolage Grotesque ExtraBold" pitchFamily="34" charset="-120"/>
               </a:rPr>
-              <a:t> thiểu,</a:t>
-            </a:r>
-            <a:r>
-              <a:rPr lang="en-US" sz="4500" dirty="0" spc="-45" kern="0">
+              <a:t> thiểu</a:t>
+            </a:r>
+            <a:r>
+              <a:rPr lang="en-US" sz="6900" dirty="0" spc="0" kern="0">
                 <a:solidFill>
                   <a:srgbClr val="14161C"/>
                 </a:solidFill>
@@ -7458,10 +7414,10 @@
                 <a:ea typeface="Bricolage Grotesque ExtraBold" pitchFamily="34" charset="-122"/>
                 <a:cs typeface="Bricolage Grotesque ExtraBold" pitchFamily="34" charset="-120"/>
               </a:rPr>
-              <a:t> và</a:t>
-            </a:r>
-            <a:r>
-              <a:rPr lang="en-US" sz="4500" dirty="0" spc="0" kern="0">
+              <a:t> cho</a:t>
+            </a:r>
+            <a:r>
+              <a:rPr lang="en-US" sz="6900" dirty="0" spc="5" kern="0">
                 <a:solidFill>
                   <a:srgbClr val="14161C"/>
                 </a:solidFill>
@@ -7469,42 +7425,9 @@
                 <a:ea typeface="Bricolage Grotesque ExtraBold" pitchFamily="34" charset="-122"/>
                 <a:cs typeface="Bricolage Grotesque ExtraBold" pitchFamily="34" charset="-120"/>
               </a:rPr>
-              <a:t> không giữ</a:t>
-            </a:r>
-            <a:r>
-              <a:rPr lang="en-US" sz="4500" dirty="0" spc="-3" kern="0">
-                <a:solidFill>
-                  <a:srgbClr val="14161C"/>
-                </a:solidFill>
-                <a:latin typeface="Bricolage Grotesque ExtraBold" pitchFamily="34" charset="0"/>
-                <a:ea typeface="Bricolage Grotesque ExtraBold" pitchFamily="34" charset="-122"/>
-                <a:cs typeface="Bricolage Grotesque ExtraBold" pitchFamily="34" charset="-120"/>
-              </a:rPr>
-              <a:t> khóa</a:t>
-            </a:r>
-            <a:r>
-              <a:rPr lang="en-US" sz="4500" dirty="0" spc="4" kern="0">
-                <a:solidFill>
-                  <a:srgbClr val="14161C"/>
-                </a:solidFill>
-                <a:latin typeface="Bricolage Grotesque ExtraBold" pitchFamily="34" charset="0"/>
-                <a:ea typeface="Bricolage Grotesque ExtraBold" pitchFamily="34" charset="-122"/>
-                <a:cs typeface="Bricolage Grotesque ExtraBold" pitchFamily="34" charset="-120"/>
-              </a:rPr>
-              <a:t> dài</a:t>
-            </a:r>
-            <a:r>
-              <a:rPr lang="en-US" sz="4500" dirty="0" spc="5" kern="0">
-                <a:solidFill>
-                  <a:srgbClr val="14161C"/>
-                </a:solidFill>
-                <a:latin typeface="Bricolage Grotesque ExtraBold" pitchFamily="34" charset="0"/>
-                <a:ea typeface="Bricolage Grotesque ExtraBold" pitchFamily="34" charset="-122"/>
-                <a:cs typeface="Bricolage Grotesque ExtraBold" pitchFamily="34" charset="-120"/>
-              </a:rPr>
-              <a:t> hạn</a:t>
-            </a:r>
-            <a:endParaRPr lang="en-US" sz="4500" dirty="0"/>
+              <a:t> pipeline</a:t>
+            </a:r>
+            <a:endParaRPr lang="en-US" sz="6900" dirty="0"/>
           </a:p>
         </p:txBody>
       </p:sp>
@@ -8886,8 +8809,8 @@
         </p:nvSpPr>
         <p:spPr>
           <a:xfrm>
-            <a:off x="914400" y="1238250"/>
-            <a:ext cx="16192500" cy="857250"/>
+            <a:off x="914400" y="1219200"/>
+            <a:ext cx="16459200" cy="1047750"/>
           </a:xfrm>
           <a:prstGeom prst="rect">
             <a:avLst/>
@@ -8896,17 +8819,17 @@
           <a:ln/>
         </p:spPr>
         <p:txBody>
-          <a:bodyPr wrap="square" lIns="0" tIns="28575" rIns="0" bIns="-28575" rtlCol="0" anchor="t"/>
+          <a:bodyPr wrap="square" lIns="0" tIns="43815" rIns="0" bIns="-43815" rtlCol="0" anchor="t"/>
           <a:lstStyle/>
           <a:p>
             <a:pPr algn="l" indent="0" marL="0">
               <a:lnSpc>
-                <a:spcPts val="4950"/>
+                <a:spcPts val="7590"/>
               </a:lnSpc>
               <a:buNone/>
             </a:pPr>
             <a:r>
-              <a:rPr lang="en-US" sz="4500" dirty="0" spc="-13" kern="0">
+              <a:rPr lang="en-US" sz="6900" dirty="0" spc="-1" kern="0">
                 <a:solidFill>
                   <a:srgbClr val="F3EEE3"/>
                 </a:solidFill>
@@ -8914,10 +8837,10 @@
                 <a:ea typeface="Bricolage Grotesque ExtraBold" pitchFamily="34" charset="-122"/>
                 <a:cs typeface="Bricolage Grotesque ExtraBold" pitchFamily="34" charset="-120"/>
               </a:rPr>
-              <a:t>Environment</a:t>
-            </a:r>
-            <a:r>
-              <a:rPr lang="en-US" sz="4500" dirty="0" spc="-10" kern="0">
+              <a:t>Bí mật</a:t>
+            </a:r>
+            <a:r>
+              <a:rPr lang="en-US" sz="6900" dirty="0" spc="-77" kern="0">
                 <a:solidFill>
                   <a:srgbClr val="F3EEE3"/>
                 </a:solidFill>
@@ -8925,10 +8848,10 @@
                 <a:ea typeface="Bricolage Grotesque ExtraBold" pitchFamily="34" charset="-122"/>
                 <a:cs typeface="Bricolage Grotesque ExtraBold" pitchFamily="34" charset="-120"/>
               </a:rPr>
-              <a:t> gắn</a:t>
-            </a:r>
-            <a:r>
-              <a:rPr lang="en-US" sz="4500" dirty="0" spc="3" kern="0">
+              <a:t> và</a:t>
+            </a:r>
+            <a:r>
+              <a:rPr lang="en-US" sz="6900" dirty="0" spc="-65" kern="0">
                 <a:solidFill>
                   <a:srgbClr val="F3EEE3"/>
                 </a:solidFill>
@@ -8936,10 +8859,10 @@
                 <a:ea typeface="Bricolage Grotesque ExtraBold" pitchFamily="34" charset="-122"/>
                 <a:cs typeface="Bricolage Grotesque ExtraBold" pitchFamily="34" charset="-120"/>
               </a:rPr>
-              <a:t> bí</a:t>
-            </a:r>
-            <a:r>
-              <a:rPr lang="en-US" sz="4500" dirty="0" spc="2" kern="0">
+              <a:t> người</a:t>
+            </a:r>
+            <a:r>
+              <a:rPr lang="en-US" sz="6900" dirty="0" spc="1" kern="0">
                 <a:solidFill>
                   <a:srgbClr val="F3EEE3"/>
                 </a:solidFill>
@@ -8947,42 +8870,9 @@
                 <a:ea typeface="Bricolage Grotesque ExtraBold" pitchFamily="34" charset="-122"/>
                 <a:cs typeface="Bricolage Grotesque ExtraBold" pitchFamily="34" charset="-120"/>
               </a:rPr>
-              <a:t> mật</a:t>
-            </a:r>
-            <a:r>
-              <a:rPr lang="en-US" sz="4500" dirty="0" spc="-46" kern="0">
-                <a:solidFill>
-                  <a:srgbClr val="F3EEE3"/>
-                </a:solidFill>
-                <a:latin typeface="Bricolage Grotesque ExtraBold" pitchFamily="34" charset="0"/>
-                <a:ea typeface="Bricolage Grotesque ExtraBold" pitchFamily="34" charset="-122"/>
-                <a:cs typeface="Bricolage Grotesque ExtraBold" pitchFamily="34" charset="-120"/>
-              </a:rPr>
-              <a:t> và</a:t>
-            </a:r>
-            <a:r>
-              <a:rPr lang="en-US" sz="4500" dirty="0" spc="-42" kern="0">
-                <a:solidFill>
-                  <a:srgbClr val="F3EEE3"/>
-                </a:solidFill>
-                <a:latin typeface="Bricolage Grotesque ExtraBold" pitchFamily="34" charset="0"/>
-                <a:ea typeface="Bricolage Grotesque ExtraBold" pitchFamily="34" charset="-122"/>
-                <a:cs typeface="Bricolage Grotesque ExtraBold" pitchFamily="34" charset="-120"/>
-              </a:rPr>
-              <a:t> người</a:t>
-            </a:r>
-            <a:r>
-              <a:rPr lang="en-US" sz="4500" dirty="0" spc="1" kern="0">
-                <a:solidFill>
-                  <a:srgbClr val="F3EEE3"/>
-                </a:solidFill>
-                <a:latin typeface="Bricolage Grotesque ExtraBold" pitchFamily="34" charset="0"/>
-                <a:ea typeface="Bricolage Grotesque ExtraBold" pitchFamily="34" charset="-122"/>
-                <a:cs typeface="Bricolage Grotesque ExtraBold" pitchFamily="34" charset="-120"/>
-              </a:rPr>
               <a:t> duyệt</a:t>
             </a:r>
-            <a:endParaRPr lang="en-US" sz="4500" dirty="0"/>
+            <a:endParaRPr lang="en-US" sz="6900" dirty="0"/>
           </a:p>
         </p:txBody>
       </p:sp>
@@ -10285,8 +10175,8 @@
         </p:nvSpPr>
         <p:spPr>
           <a:xfrm>
-            <a:off x="914400" y="1238250"/>
-            <a:ext cx="16192500" cy="857250"/>
+            <a:off x="914400" y="1219200"/>
+            <a:ext cx="16459200" cy="1047750"/>
           </a:xfrm>
           <a:prstGeom prst="rect">
             <a:avLst/>
@@ -10295,17 +10185,17 @@
           <a:ln/>
         </p:spPr>
         <p:txBody>
-          <a:bodyPr wrap="square" lIns="0" tIns="28575" rIns="0" bIns="-28575" rtlCol="0" anchor="t"/>
+          <a:bodyPr wrap="square" lIns="0" tIns="43815" rIns="0" bIns="-43815" rtlCol="0" anchor="t"/>
           <a:lstStyle/>
           <a:p>
             <a:pPr algn="l" indent="0" marL="0">
               <a:lnSpc>
-                <a:spcPts val="4950"/>
+                <a:spcPts val="7590"/>
               </a:lnSpc>
               <a:buNone/>
             </a:pPr>
             <a:r>
-              <a:rPr lang="en-US" sz="4500" dirty="0" spc="4" kern="0">
+              <a:rPr lang="en-US" sz="6900" dirty="0" spc="4" kern="0">
                 <a:solidFill>
                   <a:srgbClr val="14161C"/>
                 </a:solidFill>
@@ -10316,7 +10206,7 @@
               <a:t>Kiểm</a:t>
             </a:r>
             <a:r>
-              <a:rPr lang="en-US" sz="4500" dirty="0" spc="-16" kern="0">
+              <a:rPr lang="en-US" sz="6900" dirty="0" spc="-30" kern="0">
                 <a:solidFill>
                   <a:srgbClr val="14161C"/>
                 </a:solidFill>
@@ -10327,7 +10217,7 @@
               <a:t> tra</a:t>
             </a:r>
             <a:r>
-              <a:rPr lang="en-US" sz="4500" dirty="0" spc="2" kern="0">
+              <a:rPr lang="en-US" sz="6900" dirty="0" spc="-4" kern="0">
                 <a:solidFill>
                   <a:srgbClr val="14161C"/>
                 </a:solidFill>
@@ -10338,7 +10228,7 @@
               <a:t> bắt</a:t>
             </a:r>
             <a:r>
-              <a:rPr lang="en-US" sz="4500" dirty="0" spc="5" kern="0">
+              <a:rPr lang="en-US" sz="6900" dirty="0" spc="7" kern="0">
                 <a:solidFill>
                   <a:srgbClr val="14161C"/>
                 </a:solidFill>
@@ -10349,7 +10239,7 @@
               <a:t> buộc</a:t>
             </a:r>
             <a:r>
-              <a:rPr lang="en-US" sz="4500" dirty="0" spc="4" kern="0">
+              <a:rPr lang="en-US" sz="6900" dirty="0" spc="-79" kern="0">
                 <a:solidFill>
                   <a:srgbClr val="14161C"/>
                 </a:solidFill>
@@ -10357,10 +10247,10 @@
                 <a:ea typeface="Bricolage Grotesque ExtraBold" pitchFamily="34" charset="-122"/>
                 <a:cs typeface="Bricolage Grotesque ExtraBold" pitchFamily="34" charset="-120"/>
               </a:rPr>
-              <a:t> phải</a:t>
-            </a:r>
-            <a:r>
-              <a:rPr lang="en-US" sz="4500" dirty="0" spc="-1" kern="0">
+              <a:t> trước</a:t>
+            </a:r>
+            <a:r>
+              <a:rPr lang="en-US" sz="6900" dirty="0" spc="-36" kern="0">
                 <a:solidFill>
                   <a:srgbClr val="14161C"/>
                 </a:solidFill>
@@ -10368,42 +10258,9 @@
                 <a:ea typeface="Bricolage Grotesque ExtraBold" pitchFamily="34" charset="-122"/>
                 <a:cs typeface="Bricolage Grotesque ExtraBold" pitchFamily="34" charset="-120"/>
               </a:rPr>
-              <a:t> qua</a:t>
-            </a:r>
-            <a:r>
-              <a:rPr lang="en-US" sz="4500" dirty="0" spc="-49" kern="0">
-                <a:solidFill>
-                  <a:srgbClr val="14161C"/>
-                </a:solidFill>
-                <a:latin typeface="Bricolage Grotesque ExtraBold" pitchFamily="34" charset="0"/>
-                <a:ea typeface="Bricolage Grotesque ExtraBold" pitchFamily="34" charset="-122"/>
-                <a:cs typeface="Bricolage Grotesque ExtraBold" pitchFamily="34" charset="-120"/>
-              </a:rPr>
-              <a:t> trước</a:t>
-            </a:r>
-            <a:r>
-              <a:rPr lang="en-US" sz="4500" dirty="0" spc="1" kern="0">
-                <a:solidFill>
-                  <a:srgbClr val="14161C"/>
-                </a:solidFill>
-                <a:latin typeface="Bricolage Grotesque ExtraBold" pitchFamily="34" charset="0"/>
-                <a:ea typeface="Bricolage Grotesque ExtraBold" pitchFamily="34" charset="-122"/>
-                <a:cs typeface="Bricolage Grotesque ExtraBold" pitchFamily="34" charset="-120"/>
-              </a:rPr>
-              <a:t> khi</a:t>
-            </a:r>
-            <a:r>
-              <a:rPr lang="en-US" sz="4500" dirty="0" spc="-24" kern="0">
-                <a:solidFill>
-                  <a:srgbClr val="14161C"/>
-                </a:solidFill>
-                <a:latin typeface="Bricolage Grotesque ExtraBold" pitchFamily="34" charset="0"/>
-                <a:ea typeface="Bricolage Grotesque ExtraBold" pitchFamily="34" charset="-122"/>
-                <a:cs typeface="Bricolage Grotesque ExtraBold" pitchFamily="34" charset="-120"/>
-              </a:rPr>
               <a:t> merge</a:t>
             </a:r>
-            <a:endParaRPr lang="en-US" sz="4500" dirty="0"/>
+            <a:endParaRPr lang="en-US" sz="6900" dirty="0"/>
           </a:p>
         </p:txBody>
       </p:sp>
@@ -11609,8 +11466,8 @@
         </p:nvSpPr>
         <p:spPr>
           <a:xfrm>
-            <a:off x="914400" y="1238250"/>
-            <a:ext cx="16192500" cy="857250"/>
+            <a:off x="914400" y="1219200"/>
+            <a:ext cx="16459200" cy="1047750"/>
           </a:xfrm>
           <a:prstGeom prst="rect">
             <a:avLst/>
@@ -11619,17 +11476,17 @@
           <a:ln/>
         </p:spPr>
         <p:txBody>
-          <a:bodyPr wrap="square" lIns="0" tIns="28575" rIns="0" bIns="-28575" rtlCol="0" anchor="t"/>
+          <a:bodyPr wrap="square" lIns="0" tIns="43815" rIns="0" bIns="-43815" rtlCol="0" anchor="t"/>
           <a:lstStyle/>
           <a:p>
             <a:pPr algn="l" indent="0" marL="0">
               <a:lnSpc>
-                <a:spcPts val="4950"/>
+                <a:spcPts val="7590"/>
               </a:lnSpc>
               <a:buNone/>
             </a:pPr>
             <a:r>
-              <a:rPr lang="en-US" sz="4500" dirty="0" spc="1" kern="0">
+              <a:rPr lang="en-US" sz="6900" dirty="0" spc="0" kern="0">
                 <a:solidFill>
                   <a:srgbClr val="F3EEE3"/>
                 </a:solidFill>
@@ -11640,7 +11497,7 @@
               <a:t>Mỗi</a:t>
             </a:r>
             <a:r>
-              <a:rPr lang="en-US" sz="4500" dirty="0" spc="0" kern="0">
+              <a:rPr lang="en-US" sz="6900" dirty="0" spc="1" kern="0">
                 <a:solidFill>
                   <a:srgbClr val="F3EEE3"/>
                 </a:solidFill>
@@ -11651,7 +11508,7 @@
               <a:t> quyết</a:t>
             </a:r>
             <a:r>
-              <a:rPr lang="en-US" sz="4500" dirty="0" spc="18" kern="0">
+              <a:rPr lang="en-US" sz="6900" dirty="0" spc="22" kern="0">
                 <a:solidFill>
                   <a:srgbClr val="F3EEE3"/>
                 </a:solidFill>
@@ -11662,7 +11519,7 @@
               <a:t> định</a:t>
             </a:r>
             <a:r>
-              <a:rPr lang="en-US" sz="4500" dirty="0" spc="1" kern="0">
+              <a:rPr lang="en-US" sz="6900" dirty="0" spc="-1" kern="0">
                 <a:solidFill>
                   <a:srgbClr val="F3EEE3"/>
                 </a:solidFill>
@@ -11673,7 +11530,7 @@
               <a:t> có</a:t>
             </a:r>
             <a:r>
-              <a:rPr lang="en-US" sz="4500" dirty="0" spc="2" kern="0">
+              <a:rPr lang="en-US" sz="6900" dirty="0" spc="0" kern="0">
                 <a:solidFill>
                   <a:srgbClr val="F3EEE3"/>
                 </a:solidFill>
@@ -11683,7 +11540,7 @@
               </a:rPr>
               <a:t> giá</a:t>
             </a:r>
-            <a:endParaRPr lang="en-US" sz="4500" dirty="0"/>
+            <a:endParaRPr lang="en-US" sz="6900" dirty="0"/>
           </a:p>
         </p:txBody>
       </p:sp>
@@ -13234,8 +13091,8 @@
         </p:nvSpPr>
         <p:spPr>
           <a:xfrm>
-            <a:off x="914400" y="1238250"/>
-            <a:ext cx="16459200" cy="666750"/>
+            <a:off x="914400" y="1219200"/>
+            <a:ext cx="16459200" cy="1047750"/>
           </a:xfrm>
           <a:prstGeom prst="rect">
             <a:avLst/>
@@ -13244,17 +13101,17 @@
           <a:ln/>
         </p:spPr>
         <p:txBody>
-          <a:bodyPr wrap="square" lIns="0" tIns="10477" rIns="0" bIns="-10477" rtlCol="0" anchor="t"/>
+          <a:bodyPr wrap="square" lIns="0" tIns="21907" rIns="0" bIns="-21907" rtlCol="0" anchor="t"/>
           <a:lstStyle/>
           <a:p>
             <a:pPr algn="l" indent="0" marL="0">
               <a:lnSpc>
-                <a:spcPts val="3795"/>
+                <a:spcPts val="7935"/>
               </a:lnSpc>
               <a:buNone/>
             </a:pPr>
             <a:r>
-              <a:rPr lang="en-US" sz="3300" dirty="0" spc="0" kern="0">
+              <a:rPr lang="en-US" sz="6900" dirty="0" spc="6" kern="0">
                 <a:solidFill>
                   <a:srgbClr val="14161C"/>
                 </a:solidFill>
@@ -13265,7 +13122,7 @@
               <a:t>PR</a:t>
             </a:r>
             <a:r>
-              <a:rPr lang="en-US" sz="3300" dirty="0" spc="-3" kern="0">
+              <a:rPr lang="en-US" sz="6900" dirty="0" spc="-1" kern="0">
                 <a:solidFill>
                   <a:srgbClr val="14161C"/>
                 </a:solidFill>
@@ -13276,7 +13133,7 @@
               <a:t> từ</a:t>
             </a:r>
             <a:r>
-              <a:rPr lang="en-US" sz="3300" dirty="0" spc="-7" kern="0">
+              <a:rPr lang="en-US" sz="6900" dirty="0" spc="-12" kern="0">
                 <a:solidFill>
                   <a:srgbClr val="14161C"/>
                 </a:solidFill>
@@ -13287,7 +13144,7 @@
               <a:t> fork</a:t>
             </a:r>
             <a:r>
-              <a:rPr lang="en-US" sz="3300" dirty="0" spc="1" kern="0">
+              <a:rPr lang="en-US" sz="6900" dirty="0" spc="-2" kern="0">
                 <a:solidFill>
                   <a:srgbClr val="14161C"/>
                 </a:solidFill>
@@ -13295,10 +13152,10 @@
                 <a:ea typeface="Bricolage Grotesque ExtraBold" pitchFamily="34" charset="-122"/>
                 <a:cs typeface="Bricolage Grotesque ExtraBold" pitchFamily="34" charset="-120"/>
               </a:rPr>
-              <a:t> của</a:t>
-            </a:r>
-            <a:r>
-              <a:rPr lang="en-US" sz="3300" dirty="0" spc="-33" kern="0">
+              <a:t> có</a:t>
+            </a:r>
+            <a:r>
+              <a:rPr lang="en-US" sz="6900" dirty="0" spc="2" kern="0">
                 <a:solidFill>
                   <a:srgbClr val="14161C"/>
                 </a:solidFill>
@@ -13306,10 +13163,10 @@
                 <a:ea typeface="Bricolage Grotesque ExtraBold" pitchFamily="34" charset="-122"/>
                 <a:cs typeface="Bricolage Grotesque ExtraBold" pitchFamily="34" charset="-120"/>
               </a:rPr>
-              <a:t> người</a:t>
-            </a:r>
-            <a:r>
-              <a:rPr lang="en-US" sz="3300" dirty="0" spc="-1" kern="0">
+              <a:t> dùng</a:t>
+            </a:r>
+            <a:r>
+              <a:rPr lang="en-US" sz="6900" dirty="0" spc="-92" kern="0">
                 <a:solidFill>
                   <a:srgbClr val="14161C"/>
                 </a:solidFill>
@@ -13317,10 +13174,10 @@
                 <a:ea typeface="Bricolage Grotesque ExtraBold" pitchFamily="34" charset="-122"/>
                 <a:cs typeface="Bricolage Grotesque ExtraBold" pitchFamily="34" charset="-120"/>
               </a:rPr>
-              <a:t> lạ</a:t>
-            </a:r>
-            <a:r>
-              <a:rPr lang="en-US" sz="3300" dirty="0" spc="-2" kern="0">
+              <a:t> được</a:t>
+            </a:r>
+            <a:r>
+              <a:rPr lang="en-US" sz="6900" dirty="0" spc="1" kern="0">
                 <a:solidFill>
                   <a:srgbClr val="14161C"/>
                 </a:solidFill>
@@ -13328,10 +13185,10 @@
                 <a:ea typeface="Bricolage Grotesque ExtraBold" pitchFamily="34" charset="-122"/>
                 <a:cs typeface="Bricolage Grotesque ExtraBold" pitchFamily="34" charset="-120"/>
               </a:rPr>
-              <a:t> có</a:t>
-            </a:r>
-            <a:r>
-              <a:rPr lang="en-US" sz="3300" dirty="0" spc="0" kern="0">
+              <a:t> bí</a:t>
+            </a:r>
+            <a:r>
+              <a:rPr lang="en-US" sz="6900" dirty="0" spc="-2" kern="0">
                 <a:solidFill>
                   <a:srgbClr val="14161C"/>
                 </a:solidFill>
@@ -13339,53 +13196,9 @@
                 <a:ea typeface="Bricolage Grotesque ExtraBold" pitchFamily="34" charset="-122"/>
                 <a:cs typeface="Bricolage Grotesque ExtraBold" pitchFamily="34" charset="-120"/>
               </a:rPr>
-              <a:t> dùng</a:t>
-            </a:r>
-            <a:r>
-              <a:rPr lang="en-US" sz="3300" dirty="0" spc="-2" kern="0">
-                <a:solidFill>
-                  <a:srgbClr val="14161C"/>
-                </a:solidFill>
-                <a:latin typeface="Bricolage Grotesque ExtraBold" pitchFamily="34" charset="0"/>
-                <a:ea typeface="Bricolage Grotesque ExtraBold" pitchFamily="34" charset="-122"/>
-                <a:cs typeface="Bricolage Grotesque ExtraBold" pitchFamily="34" charset="-120"/>
-              </a:rPr>
-              <a:t> bí</a:t>
-            </a:r>
-            <a:r>
-              <a:rPr lang="en-US" sz="3300" dirty="0" spc="0" kern="0">
-                <a:solidFill>
-                  <a:srgbClr val="14161C"/>
-                </a:solidFill>
-                <a:latin typeface="Bricolage Grotesque ExtraBold" pitchFamily="34" charset="0"/>
-                <a:ea typeface="Bricolage Grotesque ExtraBold" pitchFamily="34" charset="-122"/>
-                <a:cs typeface="Bricolage Grotesque ExtraBold" pitchFamily="34" charset="-120"/>
-              </a:rPr>
-              <a:t> mật</a:t>
-            </a:r>
-            <a:r>
-              <a:rPr lang="en-US" sz="3300" dirty="0" spc="-11" kern="0">
-                <a:solidFill>
-                  <a:srgbClr val="14161C"/>
-                </a:solidFill>
-                <a:latin typeface="Bricolage Grotesque ExtraBold" pitchFamily="34" charset="0"/>
-                <a:ea typeface="Bricolage Grotesque ExtraBold" pitchFamily="34" charset="-122"/>
-                <a:cs typeface="Bricolage Grotesque ExtraBold" pitchFamily="34" charset="-120"/>
-              </a:rPr>
-              <a:t> repo</a:t>
-            </a:r>
-            <a:r>
-              <a:rPr lang="en-US" sz="3300" dirty="0" spc="-31" kern="0">
-                <a:solidFill>
-                  <a:srgbClr val="14161C"/>
-                </a:solidFill>
-                <a:latin typeface="Bricolage Grotesque ExtraBold" pitchFamily="34" charset="0"/>
-                <a:ea typeface="Bricolage Grotesque ExtraBold" pitchFamily="34" charset="-122"/>
-                <a:cs typeface="Bricolage Grotesque ExtraBold" pitchFamily="34" charset="-120"/>
-              </a:rPr>
-              <a:t> gốc?</a:t>
-            </a:r>
-            <a:endParaRPr lang="en-US" sz="3300" dirty="0"/>
+              <a:t> mật?</a:t>
+            </a:r>
+            <a:endParaRPr lang="en-US" sz="6900" dirty="0"/>
           </a:p>
         </p:txBody>
       </p:sp>
@@ -13397,7 +13210,7 @@
         </p:nvSpPr>
         <p:spPr>
           <a:xfrm>
-            <a:off x="914400" y="1952625"/>
+            <a:off x="914400" y="2247900"/>
             <a:ext cx="16459200" cy="476250"/>
           </a:xfrm>
           <a:prstGeom prst="rect">
@@ -14964,8 +14777,8 @@
         </p:nvSpPr>
         <p:spPr>
           <a:xfrm>
-            <a:off x="914400" y="1238250"/>
-            <a:ext cx="16192500" cy="857250"/>
+            <a:off x="914400" y="1219200"/>
+            <a:ext cx="16459200" cy="1047750"/>
           </a:xfrm>
           <a:prstGeom prst="rect">
             <a:avLst/>
@@ -14974,17 +14787,17 @@
           <a:ln/>
         </p:spPr>
         <p:txBody>
-          <a:bodyPr wrap="square" lIns="0" tIns="28575" rIns="0" bIns="-28575" rtlCol="0" anchor="t"/>
+          <a:bodyPr wrap="square" lIns="0" tIns="43815" rIns="0" bIns="-43815" rtlCol="0" anchor="t"/>
           <a:lstStyle/>
           <a:p>
             <a:pPr algn="l" indent="0" marL="0">
               <a:lnSpc>
-                <a:spcPts val="4950"/>
+                <a:spcPts val="7590"/>
               </a:lnSpc>
               <a:buNone/>
             </a:pPr>
             <a:r>
-              <a:rPr lang="en-US" sz="4500" dirty="0" spc="0" kern="0">
+              <a:rPr lang="en-US" sz="6900" dirty="0" spc="-2" kern="0">
                 <a:solidFill>
                   <a:srgbClr val="14161C"/>
                 </a:solidFill>
@@ -14995,7 +14808,7 @@
               <a:t>Năm</a:t>
             </a:r>
             <a:r>
-              <a:rPr lang="en-US" sz="4500" dirty="0" spc="2" kern="0">
+              <a:rPr lang="en-US" sz="6900" dirty="0" spc="0" kern="0">
                 <a:solidFill>
                   <a:srgbClr val="14161C"/>
                 </a:solidFill>
@@ -15006,7 +14819,7 @@
               <a:t> chi</a:t>
             </a:r>
             <a:r>
-              <a:rPr lang="en-US" sz="4500" dirty="0" spc="4" kern="0">
+              <a:rPr lang="en-US" sz="6900" dirty="0" spc="2" kern="0">
                 <a:solidFill>
                   <a:srgbClr val="14161C"/>
                 </a:solidFill>
@@ -15017,7 +14830,7 @@
               <a:t> tiết</a:t>
             </a:r>
             <a:r>
-              <a:rPr lang="en-US" sz="4500" dirty="0" spc="1" kern="0">
+              <a:rPr lang="en-US" sz="6900" dirty="0" spc="1" kern="0">
                 <a:solidFill>
                   <a:srgbClr val="14161C"/>
                 </a:solidFill>
@@ -15028,7 +14841,7 @@
               <a:t> khi</a:t>
             </a:r>
             <a:r>
-              <a:rPr lang="en-US" sz="4500" dirty="0" spc="0" kern="0">
+              <a:rPr lang="en-US" sz="6900" dirty="0" spc="-1" kern="0">
                 <a:solidFill>
                   <a:srgbClr val="14161C"/>
                 </a:solidFill>
@@ -15039,7 +14852,7 @@
               <a:t> cấu</a:t>
             </a:r>
             <a:r>
-              <a:rPr lang="en-US" sz="4500" dirty="0" spc="-8" kern="0">
+              <a:rPr lang="en-US" sz="6900" dirty="0" spc="-13" kern="0">
                 <a:solidFill>
                   <a:srgbClr val="14161C"/>
                 </a:solidFill>
@@ -15049,7 +14862,7 @@
               </a:rPr>
               <a:t> hình</a:t>
             </a:r>
-            <a:endParaRPr lang="en-US" sz="4500" dirty="0"/>
+            <a:endParaRPr lang="en-US" sz="6900" dirty="0"/>
           </a:p>
         </p:txBody>
       </p:sp>

--- a/system-design-101/vi/lessons/sd-13-027/slides/sd-13-027.pptx
+++ b/system-design-101/vi/lessons/sd-13-027/slides/sd-13-027.pptx
@@ -6043,17 +6043,17 @@
           <a:ln/>
         </p:spPr>
         <p:txBody>
-          <a:bodyPr wrap="square" lIns="0" tIns="12144" rIns="0" bIns="-12144" rtlCol="0" anchor="t"/>
+          <a:bodyPr wrap="square" lIns="0" tIns="13764" rIns="0" bIns="-13764" rtlCol="0" anchor="t"/>
           <a:lstStyle/>
           <a:p>
             <a:pPr algn="l" indent="0" marL="0">
               <a:lnSpc>
-                <a:spcPts val="2925"/>
+                <a:spcPts val="3315"/>
               </a:lnSpc>
               <a:buNone/>
             </a:pPr>
             <a:r>
-              <a:rPr lang="en-US" sz="2250" b="1" dirty="0" spc="-5" kern="0">
+              <a:rPr lang="en-US" sz="2550" b="1" dirty="0" spc="-11" kern="0">
                 <a:solidFill>
                   <a:srgbClr val="E4E1D8"/>
                 </a:solidFill>
@@ -6064,7 +6064,7 @@
               <a:t>Chạy</a:t>
             </a:r>
             <a:r>
-              <a:rPr lang="en-US" sz="2250" b="1" dirty="0" spc="0" kern="0">
+              <a:rPr lang="en-US" sz="2550" b="1" dirty="0" spc="-1" kern="0">
                 <a:solidFill>
                   <a:srgbClr val="E4E1D8"/>
                 </a:solidFill>
@@ -6074,7 +6074,7 @@
               </a:rPr>
               <a:t> gì?</a:t>
             </a:r>
-            <a:endParaRPr lang="en-US" sz="2250" dirty="0"/>
+            <a:endParaRPr lang="en-US" sz="2550" dirty="0"/>
           </a:p>
         </p:txBody>
       </p:sp>
@@ -6272,17 +6272,17 @@
           <a:ln/>
         </p:spPr>
         <p:txBody>
-          <a:bodyPr wrap="square" lIns="0" tIns="12144" rIns="0" bIns="-12144" rtlCol="0" anchor="t"/>
+          <a:bodyPr wrap="square" lIns="0" tIns="13764" rIns="0" bIns="-13764" rtlCol="0" anchor="t"/>
           <a:lstStyle/>
           <a:p>
             <a:pPr algn="l" indent="0" marL="0">
               <a:lnSpc>
-                <a:spcPts val="2925"/>
+                <a:spcPts val="3315"/>
               </a:lnSpc>
               <a:buNone/>
             </a:pPr>
             <a:r>
-              <a:rPr lang="en-US" sz="2250" b="1" dirty="0" spc="5" kern="0">
+              <a:rPr lang="en-US" sz="2550" b="1" dirty="0" spc="2" kern="0">
                 <a:solidFill>
                   <a:srgbClr val="E4E1D8"/>
                 </a:solidFill>
@@ -6293,7 +6293,7 @@
               <a:t>Có</a:t>
             </a:r>
             <a:r>
-              <a:rPr lang="en-US" sz="2250" b="1" dirty="0" spc="-1" kern="0">
+              <a:rPr lang="en-US" sz="2550" b="1" dirty="0" spc="-3" kern="0">
                 <a:solidFill>
                   <a:srgbClr val="E4E1D8"/>
                 </a:solidFill>
@@ -6304,7 +6304,7 @@
               <a:t> commit</a:t>
             </a:r>
             <a:r>
-              <a:rPr lang="en-US" sz="2250" b="1" dirty="0" spc="5" kern="0">
+              <a:rPr lang="en-US" sz="2550" b="1" dirty="0" spc="2" kern="0">
                 <a:solidFill>
                   <a:srgbClr val="E4E1D8"/>
                 </a:solidFill>
@@ -6314,7 +6314,7 @@
               </a:rPr>
               <a:t> mới?</a:t>
             </a:r>
-            <a:endParaRPr lang="en-US" sz="2250" dirty="0"/>
+            <a:endParaRPr lang="en-US" sz="2550" dirty="0"/>
           </a:p>
         </p:txBody>
       </p:sp>
@@ -6642,17 +6642,17 @@
           <a:ln/>
         </p:spPr>
         <p:txBody>
-          <a:bodyPr wrap="square" lIns="0" tIns="12954" rIns="0" bIns="-12954" rtlCol="0" anchor="t"/>
+          <a:bodyPr wrap="square" lIns="0" tIns="13764" rIns="0" bIns="-13764" rtlCol="0" anchor="t"/>
           <a:lstStyle/>
           <a:p>
             <a:pPr algn="l" indent="0" marL="0">
               <a:lnSpc>
-                <a:spcPts val="3120"/>
+                <a:spcPts val="3315"/>
               </a:lnSpc>
               <a:buNone/>
             </a:pPr>
             <a:r>
-              <a:rPr lang="en-US" sz="2400" dirty="0" spc="-1" kern="0">
+              <a:rPr lang="en-US" sz="2550" dirty="0" spc="1" kern="0">
                 <a:solidFill>
                   <a:srgbClr val="E4E1D8"/>
                 </a:solidFill>
@@ -6663,7 +6663,7 @@
               <a:t>Cache</a:t>
             </a:r>
             <a:r>
-              <a:rPr lang="en-US" sz="2400" dirty="0" spc="3" kern="0">
+              <a:rPr lang="en-US" sz="2550" dirty="0" spc="-2" kern="0">
                 <a:solidFill>
                   <a:srgbClr val="E4E1D8"/>
                 </a:solidFill>
@@ -6674,7 +6674,7 @@
               <a:t> phụ</a:t>
             </a:r>
             <a:r>
-              <a:rPr lang="en-US" sz="2400" dirty="0" spc="-2" kern="0">
+              <a:rPr lang="en-US" sz="2550" dirty="0" spc="-1" kern="0">
                 <a:solidFill>
                   <a:srgbClr val="E4E1D8"/>
                 </a:solidFill>
@@ -6685,7 +6685,7 @@
               <a:t> thuộc,</a:t>
             </a:r>
             <a:r>
-              <a:rPr lang="en-US" sz="2400" dirty="0" spc="-7" kern="0">
+              <a:rPr lang="en-US" sz="2550" dirty="0" spc="-8" kern="0">
                 <a:solidFill>
                   <a:srgbClr val="E4E1D8"/>
                 </a:solidFill>
@@ -6696,7 +6696,7 @@
               <a:t> chạy</a:t>
             </a:r>
             <a:r>
-              <a:rPr lang="en-US" sz="2400" dirty="0" spc="-4" kern="0">
+              <a:rPr lang="en-US" sz="2550" dirty="0" spc="-6" kern="0">
                 <a:solidFill>
                   <a:srgbClr val="E4E1D8"/>
                 </a:solidFill>
@@ -6704,10 +6704,10 @@
                 <a:ea typeface="Be Vietnam Pro" pitchFamily="34" charset="-122"/>
                 <a:cs typeface="Be Vietnam Pro" pitchFamily="34" charset="-120"/>
               </a:rPr>
-              <a:t> song</a:t>
-            </a:r>
-            <a:r>
-              <a:rPr lang="en-US" sz="2400" dirty="0" spc="-3" kern="0">
+              <a:t> song song</a:t>
+            </a:r>
+            <a:r>
+              <a:rPr lang="en-US" sz="2550" dirty="0" spc="-13" kern="0">
                 <a:solidFill>
                   <a:srgbClr val="E4E1D8"/>
                 </a:solidFill>
@@ -6715,10 +6715,10 @@
                 <a:ea typeface="Be Vietnam Pro" pitchFamily="34" charset="-122"/>
                 <a:cs typeface="Be Vietnam Pro" pitchFamily="34" charset="-120"/>
               </a:rPr>
-              <a:t> song</a:t>
-            </a:r>
-            <a:r>
-              <a:rPr lang="en-US" sz="2400" dirty="0" spc="-12" kern="0">
+              <a:t> job</a:t>
+            </a:r>
+            <a:r>
+              <a:rPr lang="en-US" sz="2550" dirty="0" spc="9" kern="0">
                 <a:solidFill>
                   <a:srgbClr val="E4E1D8"/>
                 </a:solidFill>
@@ -6726,10 +6726,10 @@
                 <a:ea typeface="Be Vietnam Pro" pitchFamily="34" charset="-122"/>
                 <a:cs typeface="Be Vietnam Pro" pitchFamily="34" charset="-120"/>
               </a:rPr>
-              <a:t> job</a:t>
-            </a:r>
-            <a:r>
-              <a:rPr lang="en-US" sz="2400" dirty="0" spc="10" kern="0">
+              <a:t> độc</a:t>
+            </a:r>
+            <a:r>
+              <a:rPr lang="en-US" sz="2550" dirty="0" spc="2" kern="0">
                 <a:solidFill>
                   <a:srgbClr val="E4E1D8"/>
                 </a:solidFill>
@@ -6737,10 +6737,10 @@
                 <a:ea typeface="Be Vietnam Pro" pitchFamily="34" charset="-122"/>
                 <a:cs typeface="Be Vietnam Pro" pitchFamily="34" charset="-120"/>
               </a:rPr>
-              <a:t> độc</a:t>
-            </a:r>
-            <a:r>
-              <a:rPr lang="en-US" sz="2400" dirty="0" spc="1" kern="0">
+              <a:t> lập.</a:t>
+            </a:r>
+            <a:r>
+              <a:rPr lang="en-US" sz="2550" dirty="0" spc="-3" kern="0">
                 <a:solidFill>
                   <a:srgbClr val="E4E1D8"/>
                 </a:solidFill>
@@ -6748,10 +6748,10 @@
                 <a:ea typeface="Be Vietnam Pro" pitchFamily="34" charset="-122"/>
                 <a:cs typeface="Be Vietnam Pro" pitchFamily="34" charset="-120"/>
               </a:rPr>
-              <a:t> lập.</a:t>
-            </a:r>
-            <a:r>
-              <a:rPr lang="en-US" sz="2400" dirty="0" spc="2" kern="0">
+              <a:t> Giữ</a:t>
+            </a:r>
+            <a:r>
+              <a:rPr lang="en-US" sz="2550" dirty="0" spc="0" kern="0">
                 <a:solidFill>
                   <a:srgbClr val="E4E1D8"/>
                 </a:solidFill>
@@ -6759,10 +6759,10 @@
                 <a:ea typeface="Be Vietnam Pro" pitchFamily="34" charset="-122"/>
                 <a:cs typeface="Be Vietnam Pro" pitchFamily="34" charset="-120"/>
               </a:rPr>
-              <a:t> Giữ cổng</a:t>
-            </a:r>
-            <a:r>
-              <a:rPr lang="en-US" sz="2400" dirty="0" spc="0" kern="0">
+              <a:t> cổng chặn</a:t>
+            </a:r>
+            <a:r>
+              <a:rPr lang="en-US" sz="2550" dirty="0" spc="6" kern="0">
                 <a:solidFill>
                   <a:srgbClr val="E4E1D8"/>
                 </a:solidFill>
@@ -6770,10 +6770,10 @@
                 <a:ea typeface="Be Vietnam Pro" pitchFamily="34" charset="-122"/>
                 <a:cs typeface="Be Vietnam Pro" pitchFamily="34" charset="-120"/>
               </a:rPr>
-              <a:t> chặn</a:t>
-            </a:r>
-            <a:r>
-              <a:rPr lang="en-US" sz="2400" dirty="0" spc="7" kern="0">
+              <a:t> dưới</a:t>
+            </a:r>
+            <a:r>
+              <a:rPr lang="en-US" sz="2550" dirty="0" spc="-15" kern="0">
                 <a:solidFill>
                   <a:srgbClr val="E4E1D8"/>
                 </a:solidFill>
@@ -6781,10 +6781,10 @@
                 <a:ea typeface="Be Vietnam Pro" pitchFamily="34" charset="-122"/>
                 <a:cs typeface="Be Vietnam Pro" pitchFamily="34" charset="-120"/>
               </a:rPr>
-              <a:t> dưới</a:t>
-            </a:r>
-            <a:r>
-              <a:rPr lang="en-US" sz="2400" dirty="0" spc="-13" kern="0">
+              <a:t> vài</a:t>
+            </a:r>
+            <a:r>
+              <a:rPr lang="en-US" sz="2550" dirty="0" spc="0" kern="0">
                 <a:solidFill>
                   <a:srgbClr val="E4E1D8"/>
                 </a:solidFill>
@@ -6792,20 +6792,9 @@
                 <a:ea typeface="Be Vietnam Pro" pitchFamily="34" charset="-122"/>
                 <a:cs typeface="Be Vietnam Pro" pitchFamily="34" charset="-120"/>
               </a:rPr>
-              <a:t> vài</a:t>
-            </a:r>
-            <a:r>
-              <a:rPr lang="en-US" sz="2400" dirty="0" spc="2" kern="0">
-                <a:solidFill>
-                  <a:srgbClr val="E4E1D8"/>
-                </a:solidFill>
-                <a:latin typeface="Be Vietnam Pro" pitchFamily="34" charset="0"/>
-                <a:ea typeface="Be Vietnam Pro" pitchFamily="34" charset="-122"/>
-                <a:cs typeface="Be Vietnam Pro" pitchFamily="34" charset="-120"/>
-              </a:rPr>
               <a:t> phút.</a:t>
             </a:r>
-            <a:endParaRPr lang="en-US" sz="2400" dirty="0"/>
+            <a:endParaRPr lang="en-US" sz="2550" dirty="0"/>
           </a:p>
         </p:txBody>
       </p:sp>
@@ -7577,7 +7566,7 @@
               <a:buNone/>
             </a:pPr>
             <a:r>
-              <a:rPr lang="en-US" sz="2250" dirty="0" kern="0">
+              <a:rPr lang="en-US" sz="2550" dirty="0" spc="5" kern="0">
                 <a:solidFill>
                   <a:srgbClr val="14161C"/>
                 </a:solidFill>
@@ -7591,7 +7580,7 @@
               <a:buNone/>
             </a:pPr>
             <a:r>
-              <a:rPr lang="en-US" sz="2250" dirty="0" spc="5" kern="0">
+              <a:rPr lang="en-US" sz="2550" dirty="0" spc="0" kern="0">
                 <a:solidFill>
                   <a:srgbClr val="14161C"/>
                 </a:solidFill>
@@ -7602,7 +7591,7 @@
               <a:t> ở</a:t>
             </a:r>
             <a:r>
-              <a:rPr lang="en-US" sz="2250" dirty="0" spc="11" kern="0">
+              <a:rPr lang="en-US" sz="2550" dirty="0" spc="8" kern="0">
                 <a:solidFill>
                   <a:srgbClr val="14161C"/>
                 </a:solidFill>
@@ -7613,7 +7602,7 @@
               <a:t> mức</a:t>
             </a:r>
             <a:r>
-              <a:rPr lang="en-US" sz="2250" dirty="0" spc="-12" kern="0">
+              <a:rPr lang="en-US" sz="2550" dirty="0" spc="-10" kern="0">
                 <a:solidFill>
                   <a:srgbClr val="14161C"/>
                 </a:solidFill>
@@ -7624,7 +7613,7 @@
               <a:t> workflow</a:t>
             </a:r>
             <a:r>
-              <a:rPr lang="en-US" sz="2250" dirty="0" spc="-3" kern="0">
+              <a:rPr lang="en-US" sz="2550" dirty="0" spc="-2" kern="0">
                 <a:solidFill>
                   <a:srgbClr val="14161C"/>
                 </a:solidFill>
@@ -7635,7 +7624,7 @@
               <a:t> hoặc</a:t>
             </a:r>
             <a:r>
-              <a:rPr lang="en-US" sz="2250" dirty="0" spc="-8" kern="0">
+              <a:rPr lang="en-US" sz="2550" dirty="0" spc="-12" kern="0">
                 <a:solidFill>
                   <a:srgbClr val="14161C"/>
                 </a:solidFill>
@@ -7646,7 +7635,7 @@
               <a:t> job,</a:t>
             </a:r>
             <a:r>
-              <a:rPr lang="en-US" sz="2250" dirty="0" spc="1" kern="0">
+              <a:rPr lang="en-US" sz="2550" dirty="0" spc="1" kern="0">
                 <a:solidFill>
                   <a:srgbClr val="14161C"/>
                 </a:solidFill>
@@ -7657,7 +7646,7 @@
               <a:t> chỉ</a:t>
             </a:r>
             <a:r>
-              <a:rPr lang="en-US" sz="2250" dirty="0" spc="2" kern="0">
+              <a:rPr lang="en-US" sz="2550" dirty="0" spc="0" kern="0">
                 <a:solidFill>
                   <a:srgbClr val="14161C"/>
                 </a:solidFill>
@@ -7668,7 +7657,7 @@
               <a:t> mở</a:t>
             </a:r>
             <a:r>
-              <a:rPr lang="en-US" sz="2250" dirty="0" spc="-1" kern="0">
+              <a:rPr lang="en-US" sz="2550" dirty="0" spc="2" kern="0">
                 <a:solidFill>
                   <a:srgbClr val="14161C"/>
                 </a:solidFill>
@@ -7676,10 +7665,10 @@
                 <a:ea typeface="Be Vietnam Pro" pitchFamily="34" charset="-122"/>
                 <a:cs typeface="Be Vietnam Pro" pitchFamily="34" charset="-120"/>
               </a:rPr>
-              <a:t> thêm khi</a:t>
-            </a:r>
-            <a:r>
-              <a:rPr lang="en-US" sz="2250" dirty="0" spc="3" kern="0">
+              <a:t> thêm</a:t>
+            </a:r>
+            <a:r>
+              <a:rPr lang="en-US" sz="2550" dirty="0" spc="-1" kern="0">
                 <a:solidFill>
                   <a:srgbClr val="14161C"/>
                 </a:solidFill>
@@ -7687,9 +7676,20 @@
                 <a:ea typeface="Be Vietnam Pro" pitchFamily="34" charset="-122"/>
                 <a:cs typeface="Be Vietnam Pro" pitchFamily="34" charset="-120"/>
               </a:rPr>
+              <a:t> khi</a:t>
+            </a:r>
+            <a:r>
+              <a:rPr lang="en-US" sz="2550" dirty="0" spc="1" kern="0">
+                <a:solidFill>
+                  <a:srgbClr val="14161C"/>
+                </a:solidFill>
+                <a:latin typeface="Be Vietnam Pro" pitchFamily="34" charset="0"/>
+                <a:ea typeface="Be Vietnam Pro" pitchFamily="34" charset="-122"/>
+                <a:cs typeface="Be Vietnam Pro" pitchFamily="34" charset="-120"/>
+              </a:rPr>
               <a:t> cần.</a:t>
             </a:r>
-            <a:endParaRPr lang="en-US" sz="2250" dirty="0"/>
+            <a:endParaRPr lang="en-US" sz="2550" dirty="0"/>
           </a:p>
         </p:txBody>
       </p:sp>
@@ -7913,17 +7913,17 @@
           <a:ln/>
         </p:spPr>
         <p:txBody>
-          <a:bodyPr wrap="square" lIns="0" tIns="12954" rIns="0" bIns="-12954" rtlCol="0" anchor="t"/>
+          <a:bodyPr wrap="square" lIns="0" tIns="13764" rIns="0" bIns="-13764" rtlCol="0" anchor="t"/>
           <a:lstStyle/>
           <a:p>
             <a:pPr algn="l" indent="0" marL="0">
               <a:lnSpc>
-                <a:spcPts val="3120"/>
+                <a:spcPts val="3315"/>
               </a:lnSpc>
               <a:buNone/>
             </a:pPr>
             <a:r>
-              <a:rPr lang="en-US" sz="2400" dirty="0" spc="-4" kern="0">
+              <a:rPr lang="en-US" sz="2550" dirty="0" spc="1" kern="0">
                 <a:solidFill>
                   <a:srgbClr val="14161C"/>
                 </a:solidFill>
@@ -7934,7 +7934,7 @@
               <a:t>Lưu</a:t>
             </a:r>
             <a:r>
-              <a:rPr lang="en-US" sz="2400" dirty="0" spc="1" kern="0">
+              <a:rPr lang="en-US" sz="2550" dirty="0" spc="2" kern="0">
                 <a:solidFill>
                   <a:srgbClr val="14161C"/>
                 </a:solidFill>
@@ -7942,10 +7942,10 @@
                 <a:ea typeface="Be Vietnam Pro" pitchFamily="34" charset="-122"/>
                 <a:cs typeface="Be Vietnam Pro" pitchFamily="34" charset="-120"/>
               </a:rPr>
-              <a:t> lâu dài</a:t>
-            </a:r>
-            <a:r>
-              <a:rPr lang="en-US" sz="2400" dirty="0" spc="-13" kern="0">
+              <a:t> lâu</a:t>
+            </a:r>
+            <a:r>
+              <a:rPr lang="en-US" sz="2550" dirty="0" spc="0" kern="0">
                 <a:solidFill>
                   <a:srgbClr val="14161C"/>
                 </a:solidFill>
@@ -7953,10 +7953,21 @@
                 <a:ea typeface="Be Vietnam Pro" pitchFamily="34" charset="-122"/>
                 <a:cs typeface="Be Vietnam Pro" pitchFamily="34" charset="-120"/>
               </a:rPr>
+              <a:t> dài</a:t>
+            </a:r>
+            <a:r>
+              <a:rPr lang="en-US" sz="2550" dirty="0" spc="-17" kern="0">
+                <a:solidFill>
+                  <a:srgbClr val="14161C"/>
+                </a:solidFill>
+                <a:latin typeface="Be Vietnam Pro" pitchFamily="34" charset="0"/>
+                <a:ea typeface="Be Vietnam Pro" pitchFamily="34" charset="-122"/>
+                <a:cs typeface="Be Vietnam Pro" pitchFamily="34" charset="-120"/>
+              </a:rPr>
               <a:t> trong</a:t>
             </a:r>
             <a:r>
-              <a:rPr lang="en-US" sz="2400" dirty="0" spc="1" kern="0">
+              <a:rPr lang="en-US" sz="2550" dirty="0" spc="2" kern="0">
                 <a:solidFill>
                   <a:srgbClr val="14161C"/>
                 </a:solidFill>
@@ -7967,7 +7978,7 @@
               <a:t> bí</a:t>
             </a:r>
             <a:r>
-              <a:rPr lang="en-US" sz="2400" dirty="0" spc="-7" kern="0">
+              <a:rPr lang="en-US" sz="2550" dirty="0" spc="-8" kern="0">
                 <a:solidFill>
                   <a:srgbClr val="14161C"/>
                 </a:solidFill>
@@ -7977,7 +7988,7 @@
               </a:rPr>
               <a:t> mật.</a:t>
             </a:r>
-            <a:endParaRPr lang="en-US" sz="2400" dirty="0"/>
+            <a:endParaRPr lang="en-US" sz="2550" dirty="0"/>
           </a:p>
         </p:txBody>
       </p:sp>
@@ -8107,17 +8118,17 @@
           <a:ln/>
         </p:spPr>
         <p:txBody>
-          <a:bodyPr wrap="square" lIns="0" tIns="12954" rIns="0" bIns="-12954" rtlCol="0" anchor="t"/>
+          <a:bodyPr wrap="square" lIns="0" tIns="13764" rIns="0" bIns="-13764" rtlCol="0" anchor="t"/>
           <a:lstStyle/>
           <a:p>
             <a:pPr algn="l" indent="0" marL="0">
               <a:lnSpc>
-                <a:spcPts val="3120"/>
+                <a:spcPts val="3315"/>
               </a:lnSpc>
               <a:buNone/>
             </a:pPr>
             <a:r>
-              <a:rPr lang="en-US" sz="2400" dirty="0" spc="-66" kern="0">
+              <a:rPr lang="en-US" sz="2550" dirty="0" spc="-69" kern="0">
                 <a:solidFill>
                   <a:srgbClr val="14161C"/>
                 </a:solidFill>
@@ -8128,7 +8139,7 @@
               <a:t>Token</a:t>
             </a:r>
             <a:r>
-              <a:rPr lang="en-US" sz="2400" dirty="0" spc="4" kern="0">
+              <a:rPr lang="en-US" sz="2550" dirty="0" spc="-1" kern="0">
                 <a:solidFill>
                   <a:srgbClr val="14161C"/>
                 </a:solidFill>
@@ -8139,7 +8150,7 @@
               <a:t> từ</a:t>
             </a:r>
             <a:r>
-              <a:rPr lang="en-US" sz="2400" dirty="0" spc="1" kern="0">
+              <a:rPr lang="en-US" sz="2550" dirty="0" spc="0" kern="0">
                 <a:solidFill>
                   <a:srgbClr val="14161C"/>
                 </a:solidFill>
@@ -8150,7 +8161,7 @@
               <a:t> GitHub</a:t>
             </a:r>
             <a:r>
-              <a:rPr lang="en-US" sz="2400" dirty="0" spc="12" kern="0">
+              <a:rPr lang="en-US" sz="2550" dirty="0" spc="12" kern="0">
                 <a:solidFill>
                   <a:srgbClr val="14161C"/>
                 </a:solidFill>
@@ -8161,7 +8172,7 @@
               <a:t> đổi</a:t>
             </a:r>
             <a:r>
-              <a:rPr lang="en-US" sz="2400" dirty="0" spc="-8" kern="0">
+              <a:rPr lang="en-US" sz="2550" dirty="0" spc="-9" kern="0">
                 <a:solidFill>
                   <a:srgbClr val="14161C"/>
                 </a:solidFill>
@@ -8172,7 +8183,7 @@
               <a:t> lấy</a:t>
             </a:r>
             <a:r>
-              <a:rPr lang="en-US" sz="2400" dirty="0" spc="2" kern="0">
+              <a:rPr lang="en-US" sz="2550" dirty="0" spc="0" kern="0">
                 <a:solidFill>
                   <a:srgbClr val="14161C"/>
                 </a:solidFill>
@@ -8180,10 +8191,10 @@
                 <a:ea typeface="Be Vietnam Pro" pitchFamily="34" charset="-122"/>
                 <a:cs typeface="Be Vietnam Pro" pitchFamily="34" charset="-120"/>
               </a:rPr>
-              <a:t> thông</a:t>
-            </a:r>
-            <a:r>
-              <a:rPr lang="en-US" sz="2400" dirty="0" spc="0" kern="0">
+              <a:t> thông tin</a:t>
+            </a:r>
+            <a:r>
+              <a:rPr lang="en-US" sz="2550" dirty="0" spc="-18" kern="0">
                 <a:solidFill>
                   <a:srgbClr val="14161C"/>
                 </a:solidFill>
@@ -8191,10 +8202,10 @@
                 <a:ea typeface="Be Vietnam Pro" pitchFamily="34" charset="-122"/>
                 <a:cs typeface="Be Vietnam Pro" pitchFamily="34" charset="-120"/>
               </a:rPr>
-              <a:t> tin</a:t>
-            </a:r>
-            <a:r>
-              <a:rPr lang="en-US" sz="2400" dirty="0" spc="-16" kern="0">
+              <a:t> xác</a:t>
+            </a:r>
+            <a:r>
+              <a:rPr lang="en-US" sz="2550" dirty="0" spc="7" kern="0">
                 <a:solidFill>
                   <a:srgbClr val="14161C"/>
                 </a:solidFill>
@@ -8202,10 +8213,10 @@
                 <a:ea typeface="Be Vietnam Pro" pitchFamily="34" charset="-122"/>
                 <a:cs typeface="Be Vietnam Pro" pitchFamily="34" charset="-120"/>
               </a:rPr>
-              <a:t> xác</a:t>
-            </a:r>
-            <a:r>
-              <a:rPr lang="en-US" sz="2400" dirty="0" spc="8" kern="0">
+              <a:t> thực</a:t>
+            </a:r>
+            <a:r>
+              <a:rPr lang="en-US" sz="2550" dirty="0" spc="-10" kern="0">
                 <a:solidFill>
                   <a:srgbClr val="14161C"/>
                 </a:solidFill>
@@ -8213,10 +8224,10 @@
                 <a:ea typeface="Be Vietnam Pro" pitchFamily="34" charset="-122"/>
                 <a:cs typeface="Be Vietnam Pro" pitchFamily="34" charset="-120"/>
               </a:rPr>
-              <a:t> thực</a:t>
-            </a:r>
-            <a:r>
-              <a:rPr lang="en-US" sz="2400" dirty="0" spc="-7" kern="0">
+              <a:t> ngắn</a:t>
+            </a:r>
+            <a:r>
+              <a:rPr lang="en-US" sz="2550" dirty="0" spc="1" kern="0">
                 <a:solidFill>
                   <a:srgbClr val="14161C"/>
                 </a:solidFill>
@@ -8224,20 +8235,9 @@
                 <a:ea typeface="Be Vietnam Pro" pitchFamily="34" charset="-122"/>
                 <a:cs typeface="Be Vietnam Pro" pitchFamily="34" charset="-120"/>
               </a:rPr>
-              <a:t> ngắn</a:t>
-            </a:r>
-            <a:r>
-              <a:rPr lang="en-US" sz="2400" dirty="0" spc="1" kern="0">
-                <a:solidFill>
-                  <a:srgbClr val="14161C"/>
-                </a:solidFill>
-                <a:latin typeface="Be Vietnam Pro" pitchFamily="34" charset="0"/>
-                <a:ea typeface="Be Vietnam Pro" pitchFamily="34" charset="-122"/>
-                <a:cs typeface="Be Vietnam Pro" pitchFamily="34" charset="-120"/>
-              </a:rPr>
               <a:t> hạn.</a:t>
             </a:r>
-            <a:endParaRPr lang="en-US" sz="2400" dirty="0"/>
+            <a:endParaRPr lang="en-US" sz="2550" dirty="0"/>
           </a:p>
         </p:txBody>
       </p:sp>
@@ -9159,17 +9159,17 @@
           <a:ln/>
         </p:spPr>
         <p:txBody>
-          <a:bodyPr wrap="square" lIns="0" tIns="12144" rIns="0" bIns="-12144" rtlCol="0" anchor="t"/>
+          <a:bodyPr wrap="square" lIns="0" tIns="13764" rIns="0" bIns="-13764" rtlCol="0" anchor="t"/>
           <a:lstStyle/>
           <a:p>
             <a:pPr algn="l" indent="0" marL="0">
               <a:lnSpc>
-                <a:spcPts val="2925"/>
+                <a:spcPts val="3315"/>
               </a:lnSpc>
               <a:buNone/>
             </a:pPr>
             <a:r>
-              <a:rPr lang="en-US" sz="2250" dirty="0" spc="0" kern="0">
+              <a:rPr lang="en-US" sz="2550" dirty="0" spc="5" kern="0">
                 <a:solidFill>
                   <a:srgbClr val="E4E1D8"/>
                 </a:solidFill>
@@ -9180,7 +9180,7 @@
               <a:t>Bí</a:t>
             </a:r>
             <a:r>
-              <a:rPr lang="en-US" sz="2250" dirty="0" spc="-12" kern="0">
+              <a:rPr lang="en-US" sz="2550" dirty="0" spc="-11" kern="0">
                 <a:solidFill>
                   <a:srgbClr val="E4E1D8"/>
                 </a:solidFill>
@@ -9191,7 +9191,7 @@
               <a:t> mật</a:t>
             </a:r>
             <a:r>
-              <a:rPr lang="en-US" sz="2250" dirty="0" spc="5" kern="0">
+              <a:rPr lang="en-US" sz="2550" dirty="0" spc="9" kern="0">
                 <a:solidFill>
                   <a:srgbClr val="E4E1D8"/>
                 </a:solidFill>
@@ -9202,7 +9202,7 @@
               <a:t> riêng</a:t>
             </a:r>
             <a:r>
-              <a:rPr lang="en-US" sz="2250" dirty="0" spc="1" kern="0">
+              <a:rPr lang="en-US" sz="2550" dirty="0" spc="-1" kern="0">
                 <a:solidFill>
                   <a:srgbClr val="E4E1D8"/>
                 </a:solidFill>
@@ -9213,7 +9213,7 @@
               <a:t> cho</a:t>
             </a:r>
             <a:r>
-              <a:rPr lang="en-US" sz="2250" dirty="0" spc="20" kern="0">
+              <a:rPr lang="en-US" sz="2550" dirty="0" spc="20" kern="0">
                 <a:solidFill>
                   <a:srgbClr val="E4E1D8"/>
                 </a:solidFill>
@@ -9224,7 +9224,7 @@
               <a:t> từng</a:t>
             </a:r>
             <a:r>
-              <a:rPr lang="en-US" sz="2250" dirty="0" spc="0" kern="0">
+              <a:rPr lang="en-US" sz="2550" dirty="0" spc="0" kern="0">
                 <a:solidFill>
                   <a:srgbClr val="E4E1D8"/>
                 </a:solidFill>
@@ -9235,7 +9235,7 @@
               <a:t> môi</a:t>
             </a:r>
             <a:r>
-              <a:rPr lang="en-US" sz="2250" dirty="0" spc="5" kern="0">
+              <a:rPr lang="en-US" sz="2550" dirty="0" spc="5" kern="0">
                 <a:solidFill>
                   <a:srgbClr val="E4E1D8"/>
                 </a:solidFill>
@@ -9245,7 +9245,7 @@
               </a:rPr>
               <a:t> trường.</a:t>
             </a:r>
-            <a:endParaRPr lang="en-US" sz="2250" dirty="0"/>
+            <a:endParaRPr lang="en-US" sz="2550" dirty="0"/>
           </a:p>
         </p:txBody>
       </p:sp>
@@ -9388,17 +9388,17 @@
           <a:ln/>
         </p:spPr>
         <p:txBody>
-          <a:bodyPr wrap="square" lIns="0" tIns="12144" rIns="0" bIns="-12144" rtlCol="0" anchor="t"/>
+          <a:bodyPr wrap="square" lIns="0" tIns="13764" rIns="0" bIns="-13764" rtlCol="0" anchor="t"/>
           <a:lstStyle/>
           <a:p>
             <a:pPr algn="l" indent="0" marL="0">
               <a:lnSpc>
-                <a:spcPts val="2925"/>
+                <a:spcPts val="3315"/>
               </a:lnSpc>
               <a:buNone/>
             </a:pPr>
             <a:r>
-              <a:rPr lang="en-US" sz="2250" dirty="0" spc="-74" kern="0">
+              <a:rPr lang="en-US" sz="2550" dirty="0" spc="-89" kern="0">
                 <a:solidFill>
                   <a:srgbClr val="E4E1D8"/>
                 </a:solidFill>
@@ -9409,7 +9409,7 @@
               <a:t>Tùy</a:t>
             </a:r>
             <a:r>
-              <a:rPr lang="en-US" sz="2250" dirty="0" spc="-11" kern="0">
+              <a:rPr lang="en-US" sz="2550" dirty="0" spc="-13" kern="0">
                 <a:solidFill>
                   <a:srgbClr val="E4E1D8"/>
                 </a:solidFill>
@@ -9420,7 +9420,7 @@
               <a:t> gói</a:t>
             </a:r>
             <a:r>
-              <a:rPr lang="en-US" sz="2250" dirty="0" spc="-17" kern="0">
+              <a:rPr lang="en-US" sz="2550" dirty="0" spc="-18" kern="0">
                 <a:solidFill>
                   <a:srgbClr val="E4E1D8"/>
                 </a:solidFill>
@@ -9431,7 +9431,7 @@
               <a:t> và</a:t>
             </a:r>
             <a:r>
-              <a:rPr lang="en-US" sz="2250" dirty="0" spc="-5" kern="0">
+              <a:rPr lang="en-US" sz="2550" dirty="0" spc="-3" kern="0">
                 <a:solidFill>
                   <a:srgbClr val="E4E1D8"/>
                 </a:solidFill>
@@ -9442,7 +9442,7 @@
               <a:t> loại</a:t>
             </a:r>
             <a:r>
-              <a:rPr lang="en-US" sz="2250" dirty="0" spc="1" kern="0">
+              <a:rPr lang="en-US" sz="2550" dirty="0" spc="1" kern="0">
                 <a:solidFill>
                   <a:srgbClr val="E4E1D8"/>
                 </a:solidFill>
@@ -9452,7 +9452,7 @@
               </a:rPr>
               <a:t> kho.</a:t>
             </a:r>
-            <a:endParaRPr lang="en-US" sz="2250" dirty="0"/>
+            <a:endParaRPr lang="en-US" sz="2550" dirty="0"/>
           </a:p>
         </p:txBody>
       </p:sp>
@@ -9481,7 +9481,7 @@
               <a:buNone/>
             </a:pPr>
             <a:r>
-              <a:rPr lang="en-US" sz="2400" dirty="0" spc="2" kern="0">
+              <a:rPr lang="en-US" sz="2550" dirty="0" spc="-1" kern="0">
                 <a:solidFill>
                   <a:srgbClr val="9AA0B5"/>
                 </a:solidFill>
@@ -9492,7 +9492,7 @@
               <a:t>Không</a:t>
             </a:r>
             <a:r>
-              <a:rPr lang="en-US" sz="2400" dirty="0" spc="1" kern="0">
+              <a:rPr lang="en-US" sz="2550" dirty="0" spc="0" kern="0">
                 <a:solidFill>
                   <a:srgbClr val="9AA0B5"/>
                 </a:solidFill>
@@ -9503,7 +9503,7 @@
               <a:t> có</a:t>
             </a:r>
             <a:r>
-              <a:rPr lang="en-US" sz="2400" dirty="0" spc="6" kern="0">
+              <a:rPr lang="en-US" sz="2550" dirty="0" spc="5" kern="0">
                 <a:solidFill>
                   <a:srgbClr val="9AA0B5"/>
                 </a:solidFill>
@@ -9514,7 +9514,7 @@
               <a:t> người</a:t>
             </a:r>
             <a:r>
-              <a:rPr lang="en-US" sz="2400" dirty="0" spc="-18" kern="0">
+              <a:rPr lang="en-US" sz="2550" dirty="0" spc="-17" kern="0">
                 <a:solidFill>
                   <a:srgbClr val="9AA0B5"/>
                 </a:solidFill>
@@ -9525,7 +9525,7 @@
               <a:t> duyệt</a:t>
             </a:r>
             <a:r>
-              <a:rPr lang="en-US" sz="2400" dirty="0" spc="-12" kern="0">
+              <a:rPr lang="en-US" sz="2550" dirty="0" spc="-15" kern="0">
                 <a:solidFill>
                   <a:srgbClr val="9AA0B5"/>
                 </a:solidFill>
@@ -9536,7 +9536,7 @@
               <a:t> bắt</a:t>
             </a:r>
             <a:r>
-              <a:rPr lang="en-US" sz="2400" dirty="0" spc="-2" kern="0">
+              <a:rPr lang="en-US" sz="2550" dirty="0" spc="-1" kern="0">
                 <a:solidFill>
                   <a:srgbClr val="9AA0B5"/>
                 </a:solidFill>
@@ -9547,7 +9547,7 @@
               <a:t> buộc:</a:t>
             </a:r>
             <a:r>
-              <a:rPr lang="en-US" sz="2400" dirty="0" spc="0" kern="0">
+              <a:rPr lang="en-US" sz="2550" dirty="0" spc="1" kern="0">
                 <a:solidFill>
                   <a:srgbClr val="9AA0B5"/>
                 </a:solidFill>
@@ -9558,7 +9558,7 @@
               <a:t> cần</a:t>
             </a:r>
             <a:r>
-              <a:rPr lang="en-US" sz="2400" dirty="0" spc="-3" kern="0">
+              <a:rPr lang="en-US" sz="2550" dirty="0" spc="-5" kern="0">
                 <a:solidFill>
                   <a:srgbClr val="9AA0B5"/>
                 </a:solidFill>
@@ -9569,7 +9569,7 @@
               <a:t> một</a:t>
             </a:r>
             <a:r>
-              <a:rPr lang="en-US" sz="2400" dirty="0" spc="1" kern="0">
+              <a:rPr lang="en-US" sz="2550" dirty="0" spc="-1" kern="0">
                 <a:solidFill>
                   <a:srgbClr val="9AA0B5"/>
                 </a:solidFill>
@@ -9580,7 +9580,7 @@
               <a:t> cơ</a:t>
             </a:r>
             <a:r>
-              <a:rPr lang="en-US" sz="2400" dirty="0" spc="-1" kern="0">
+              <a:rPr lang="en-US" sz="2550" dirty="0" spc="1" kern="0">
                 <a:solidFill>
                   <a:srgbClr val="9AA0B5"/>
                 </a:solidFill>
@@ -9591,7 +9591,7 @@
               <a:t> chế</a:t>
             </a:r>
             <a:r>
-              <a:rPr lang="en-US" sz="2400" dirty="0" spc="-18" kern="0">
+              <a:rPr lang="en-US" sz="2550" dirty="0" spc="-18" kern="0">
                 <a:solidFill>
                   <a:srgbClr val="9AA0B5"/>
                 </a:solidFill>
@@ -9602,7 +9602,7 @@
               <a:t> duyệt</a:t>
             </a:r>
             <a:r>
-              <a:rPr lang="en-US" sz="2400" dirty="0" spc="-1" kern="0">
+              <a:rPr lang="en-US" sz="2550" dirty="0" spc="2" kern="0">
                 <a:solidFill>
                   <a:srgbClr val="9AA0B5"/>
                 </a:solidFill>
@@ -9612,7 +9612,7 @@
               </a:rPr>
               <a:t> khác.</a:t>
             </a:r>
-            <a:endParaRPr lang="en-US" sz="2400" dirty="0"/>
+            <a:endParaRPr lang="en-US" sz="2550" dirty="0"/>
           </a:p>
         </p:txBody>
       </p:sp>
@@ -10847,7 +10847,7 @@
               <a:buNone/>
             </a:pPr>
             <a:r>
-              <a:rPr lang="en-US" sz="2400" dirty="0" spc="-12" kern="0">
+              <a:rPr lang="en-US" sz="2550" dirty="0" spc="-16" kern="0">
                 <a:solidFill>
                   <a:srgbClr val="F3EEE3"/>
                 </a:solidFill>
@@ -10858,7 +10858,7 @@
               <a:t>Đặt</a:t>
             </a:r>
             <a:r>
-              <a:rPr lang="en-US" sz="2400" dirty="0" spc="-1" kern="0">
+              <a:rPr lang="en-US" sz="2550" dirty="0" spc="1" kern="0">
                 <a:solidFill>
                   <a:srgbClr val="F3EEE3"/>
                 </a:solidFill>
@@ -10866,10 +10866,10 @@
                 <a:ea typeface="Be Vietnam Pro" pitchFamily="34" charset="-122"/>
                 <a:cs typeface="Be Vietnam Pro" pitchFamily="34" charset="-120"/>
               </a:rPr>
-              <a:t> các</a:t>
-            </a:r>
-            <a:r>
-              <a:rPr lang="en-US" sz="2400" dirty="0" spc="0" kern="0">
+              <a:t> các kiểm</a:t>
+            </a:r>
+            <a:r>
+              <a:rPr lang="en-US" sz="2550" dirty="0" spc="-25" kern="0">
                 <a:solidFill>
                   <a:srgbClr val="F3EEE3"/>
                 </a:solidFill>
@@ -10877,10 +10877,10 @@
                 <a:ea typeface="Be Vietnam Pro" pitchFamily="34" charset="-122"/>
                 <a:cs typeface="Be Vietnam Pro" pitchFamily="34" charset="-120"/>
               </a:rPr>
-              <a:t> kiểm</a:t>
-            </a:r>
-            <a:r>
-              <a:rPr lang="en-US" sz="2400" dirty="0" spc="-22" kern="0">
+              <a:t> tra</a:t>
+            </a:r>
+            <a:r>
+              <a:rPr lang="en-US" sz="2550" dirty="0" spc="-15" kern="0">
                 <a:solidFill>
                   <a:srgbClr val="F3EEE3"/>
                 </a:solidFill>
@@ -10888,10 +10888,10 @@
                 <a:ea typeface="Be Vietnam Pro" pitchFamily="34" charset="-122"/>
                 <a:cs typeface="Be Vietnam Pro" pitchFamily="34" charset="-120"/>
               </a:rPr>
-              <a:t> tra</a:t>
-            </a:r>
-            <a:r>
-              <a:rPr lang="en-US" sz="2400" dirty="0" spc="-12" kern="0">
+              <a:t> bắt</a:t>
+            </a:r>
+            <a:r>
+              <a:rPr lang="en-US" sz="2550" dirty="0" spc="-1" kern="0">
                 <a:solidFill>
                   <a:srgbClr val="F3EEE3"/>
                 </a:solidFill>
@@ -10899,10 +10899,10 @@
                 <a:ea typeface="Be Vietnam Pro" pitchFamily="34" charset="-122"/>
                 <a:cs typeface="Be Vietnam Pro" pitchFamily="34" charset="-120"/>
               </a:rPr>
-              <a:t> bắt</a:t>
-            </a:r>
-            <a:r>
-              <a:rPr lang="en-US" sz="2400" dirty="0" spc="-2" kern="0">
+              <a:t> buộc cho</a:t>
+            </a:r>
+            <a:r>
+              <a:rPr lang="en-US" sz="2550" dirty="0" spc="0" kern="0">
                 <a:solidFill>
                   <a:srgbClr val="F3EEE3"/>
                 </a:solidFill>
@@ -10910,10 +10910,10 @@
                 <a:ea typeface="Be Vietnam Pro" pitchFamily="34" charset="-122"/>
                 <a:cs typeface="Be Vietnam Pro" pitchFamily="34" charset="-120"/>
               </a:rPr>
-              <a:t> buộc</a:t>
-            </a:r>
-            <a:r>
-              <a:rPr lang="en-US" sz="2400" dirty="0" spc="0" kern="0">
+              <a:t> nhánh</a:t>
+            </a:r>
+            <a:r>
+              <a:rPr lang="en-US" sz="2550" dirty="0" spc="1" kern="0">
                 <a:solidFill>
                   <a:srgbClr val="F3EEE3"/>
                 </a:solidFill>
@@ -10921,31 +10921,9 @@
                 <a:ea typeface="Be Vietnam Pro" pitchFamily="34" charset="-122"/>
                 <a:cs typeface="Be Vietnam Pro" pitchFamily="34" charset="-120"/>
               </a:rPr>
-              <a:t> cho</a:t>
-            </a:r>
-            <a:r>
-              <a:rPr lang="en-US" sz="2400" dirty="0" spc="1" kern="0">
-                <a:solidFill>
-                  <a:srgbClr val="F3EEE3"/>
-                </a:solidFill>
-                <a:latin typeface="Be Vietnam Pro" pitchFamily="34" charset="0"/>
-                <a:ea typeface="Be Vietnam Pro" pitchFamily="34" charset="-122"/>
-                <a:cs typeface="Be Vietnam Pro" pitchFamily="34" charset="-120"/>
-              </a:rPr>
-              <a:t> nhánh</a:t>
-            </a:r>
-            <a:r>
-              <a:rPr lang="en-US" sz="2400" dirty="0" spc="-1" kern="0">
-                <a:solidFill>
-                  <a:srgbClr val="F3EEE3"/>
-                </a:solidFill>
-                <a:latin typeface="Be Vietnam Pro" pitchFamily="34" charset="0"/>
-                <a:ea typeface="Be Vietnam Pro" pitchFamily="34" charset="-122"/>
-                <a:cs typeface="Be Vietnam Pro" pitchFamily="34" charset="-120"/>
-              </a:rPr>
               <a:t> chính.</a:t>
             </a:r>
-            <a:endParaRPr lang="en-US" sz="2400" dirty="0"/>
+            <a:endParaRPr lang="en-US" sz="2550" dirty="0"/>
           </a:p>
         </p:txBody>
       </p:sp>
@@ -11740,7 +11718,7 @@
               <a:buNone/>
             </a:pPr>
             <a:r>
-              <a:rPr lang="en-US" sz="2250" dirty="0" spc="1" kern="0">
+              <a:rPr lang="en-US" sz="2550" dirty="0" spc="-1" kern="0">
                 <a:solidFill>
                   <a:srgbClr val="9AA0B5"/>
                 </a:solidFill>
@@ -11751,7 +11729,7 @@
               <a:t>Không</a:t>
             </a:r>
             <a:r>
-              <a:rPr lang="en-US" sz="2250" dirty="0" spc="-3" kern="0">
+              <a:rPr lang="en-US" sz="2550" dirty="0" spc="-3" kern="0">
                 <a:solidFill>
                   <a:srgbClr val="9AA0B5"/>
                 </a:solidFill>
@@ -11762,7 +11740,7 @@
               <a:t> bảo</a:t>
             </a:r>
             <a:r>
-              <a:rPr lang="en-US" sz="2250" dirty="0" spc="10" kern="0">
+              <a:rPr lang="en-US" sz="2550" dirty="0" spc="14" kern="0">
                 <a:solidFill>
                   <a:srgbClr val="9AA0B5"/>
                 </a:solidFill>
@@ -11773,7 +11751,7 @@
               <a:t> đảm</a:t>
             </a:r>
             <a:r>
-              <a:rPr lang="en-US" sz="2250" dirty="0" spc="1" kern="0">
+              <a:rPr lang="en-US" sz="2550" dirty="0" spc="0" kern="0">
                 <a:solidFill>
                   <a:srgbClr val="9AA0B5"/>
                 </a:solidFill>
@@ -11781,31 +11759,9 @@
                 <a:ea typeface="Be Vietnam Pro" pitchFamily="34" charset="-122"/>
                 <a:cs typeface="Be Vietnam Pro" pitchFamily="34" charset="-120"/>
               </a:rPr>
-              <a:t> không</a:t>
-            </a:r>
-            <a:r>
-              <a:rPr lang="en-US" sz="2250" dirty="0" spc="5" kern="0">
-                <a:solidFill>
-                  <a:srgbClr val="9AA0B5"/>
-                </a:solidFill>
-                <a:latin typeface="Be Vietnam Pro" pitchFamily="34" charset="0"/>
-                <a:ea typeface="Be Vietnam Pro" pitchFamily="34" charset="-122"/>
-                <a:cs typeface="Be Vietnam Pro" pitchFamily="34" charset="-120"/>
-              </a:rPr>
-              <a:t> có</a:t>
-            </a:r>
-            <a:r>
-              <a:rPr lang="en-US" sz="2250" dirty="0" spc="2" kern="0">
-                <a:solidFill>
-                  <a:srgbClr val="9AA0B5"/>
-                </a:solidFill>
-                <a:latin typeface="Be Vietnam Pro" pitchFamily="34" charset="0"/>
-                <a:ea typeface="Be Vietnam Pro" pitchFamily="34" charset="-122"/>
-                <a:cs typeface="Be Vietnam Pro" pitchFamily="34" charset="-120"/>
-              </a:rPr>
-              <a:t> lỗi.</a:t>
-            </a:r>
-            <a:endParaRPr lang="en-US" sz="2250" dirty="0"/>
+              <a:t> không có lỗi.</a:t>
+            </a:r>
+            <a:endParaRPr lang="en-US" sz="2550" dirty="0"/>
           </a:p>
         </p:txBody>
       </p:sp>
@@ -11918,17 +11874,17 @@
           <a:ln/>
         </p:spPr>
         <p:txBody>
-          <a:bodyPr wrap="square" lIns="0" tIns="12144" rIns="0" bIns="-12144" rtlCol="0" anchor="t"/>
+          <a:bodyPr wrap="square" lIns="0" tIns="13764" rIns="0" bIns="-13764" rtlCol="0" anchor="t"/>
           <a:lstStyle/>
           <a:p>
             <a:pPr algn="l" indent="0" marL="0">
               <a:lnSpc>
-                <a:spcPts val="2925"/>
+                <a:spcPts val="3315"/>
               </a:lnSpc>
               <a:buNone/>
             </a:pPr>
             <a:r>
-              <a:rPr lang="en-US" sz="2250" dirty="0" spc="-32" kern="0">
+              <a:rPr lang="en-US" sz="2550" dirty="0" spc="-31" kern="0">
                 <a:solidFill>
                   <a:srgbClr val="E4E1D8"/>
                 </a:solidFill>
@@ -11939,7 +11895,7 @@
               <a:t>Làm</a:t>
             </a:r>
             <a:r>
-              <a:rPr lang="en-US" sz="2250" dirty="0" spc="0" kern="0">
+              <a:rPr lang="en-US" sz="2550" dirty="0" spc="1" kern="0">
                 <a:solidFill>
                   <a:srgbClr val="E4E1D8"/>
                 </a:solidFill>
@@ -11950,7 +11906,7 @@
               <a:t> chậm</a:t>
             </a:r>
             <a:r>
-              <a:rPr lang="en-US" sz="2250" dirty="0" spc="1" kern="0">
+              <a:rPr lang="en-US" sz="2550" dirty="0" spc="0" kern="0">
                 <a:solidFill>
                   <a:srgbClr val="E4E1D8"/>
                 </a:solidFill>
@@ -11958,20 +11914,9 @@
                 <a:ea typeface="Be Vietnam Pro" pitchFamily="34" charset="-122"/>
                 <a:cs typeface="Be Vietnam Pro" pitchFamily="34" charset="-120"/>
               </a:rPr>
-              <a:t> phản</a:t>
-            </a:r>
-            <a:r>
-              <a:rPr lang="en-US" sz="2250" dirty="0" spc="2" kern="0">
-                <a:solidFill>
-                  <a:srgbClr val="E4E1D8"/>
-                </a:solidFill>
-                <a:latin typeface="Be Vietnam Pro" pitchFamily="34" charset="0"/>
-                <a:ea typeface="Be Vietnam Pro" pitchFamily="34" charset="-122"/>
-                <a:cs typeface="Be Vietnam Pro" pitchFamily="34" charset="-120"/>
-              </a:rPr>
-              <a:t> hồi.</a:t>
-            </a:r>
-            <a:endParaRPr lang="en-US" sz="2250" dirty="0"/>
+              <a:t> phản hồi.</a:t>
+            </a:r>
+            <a:endParaRPr lang="en-US" sz="2550" dirty="0"/>
           </a:p>
         </p:txBody>
       </p:sp>
@@ -12095,17 +12040,17 @@
           <a:ln/>
         </p:spPr>
         <p:txBody>
-          <a:bodyPr wrap="square" lIns="0" tIns="12144" rIns="0" bIns="-12144" rtlCol="0" anchor="t"/>
+          <a:bodyPr wrap="square" lIns="0" tIns="13764" rIns="0" bIns="-13764" rtlCol="0" anchor="t"/>
           <a:lstStyle/>
           <a:p>
             <a:pPr algn="l" indent="0" marL="0">
               <a:lnSpc>
-                <a:spcPts val="2925"/>
+                <a:spcPts val="3315"/>
               </a:lnSpc>
               <a:buNone/>
             </a:pPr>
             <a:r>
-              <a:rPr lang="en-US" sz="2250" dirty="0" spc="-32" kern="0">
+              <a:rPr lang="en-US" sz="2550" dirty="0" spc="-31" kern="0">
                 <a:solidFill>
                   <a:srgbClr val="E4E1D8"/>
                 </a:solidFill>
@@ -12116,7 +12061,7 @@
               <a:t>Làm</a:t>
             </a:r>
             <a:r>
-              <a:rPr lang="en-US" sz="2250" dirty="0" spc="0" kern="0">
+              <a:rPr lang="en-US" sz="2550" dirty="0" spc="1" kern="0">
                 <a:solidFill>
                   <a:srgbClr val="E4E1D8"/>
                 </a:solidFill>
@@ -12127,7 +12072,7 @@
               <a:t> chậm</a:t>
             </a:r>
             <a:r>
-              <a:rPr lang="en-US" sz="2250" dirty="0" spc="-8" kern="0">
+              <a:rPr lang="en-US" sz="2550" dirty="0" spc="-10" kern="0">
                 <a:solidFill>
                   <a:srgbClr val="E4E1D8"/>
                 </a:solidFill>
@@ -12138,7 +12083,7 @@
               <a:t> phát</a:t>
             </a:r>
             <a:r>
-              <a:rPr lang="en-US" sz="2250" dirty="0" spc="1" kern="0">
+              <a:rPr lang="en-US" sz="2550" dirty="0" spc="1" kern="0">
                 <a:solidFill>
                   <a:srgbClr val="E4E1D8"/>
                 </a:solidFill>
@@ -12148,7 +12093,7 @@
               </a:rPr>
               <a:t> hành.</a:t>
             </a:r>
-            <a:endParaRPr lang="en-US" sz="2250" dirty="0"/>
+            <a:endParaRPr lang="en-US" sz="2550" dirty="0"/>
           </a:p>
         </p:txBody>
       </p:sp>
@@ -12250,17 +12195,17 @@
           <a:ln/>
         </p:spPr>
         <p:txBody>
-          <a:bodyPr wrap="square" lIns="0" tIns="12144" rIns="0" bIns="-12144" rtlCol="0" anchor="t"/>
+          <a:bodyPr wrap="square" lIns="0" tIns="13764" rIns="0" bIns="-13764" rtlCol="0" anchor="t"/>
           <a:lstStyle/>
           <a:p>
             <a:pPr algn="l" indent="0" marL="0">
               <a:lnSpc>
-                <a:spcPts val="2925"/>
+                <a:spcPts val="3315"/>
               </a:lnSpc>
               <a:buNone/>
             </a:pPr>
             <a:r>
-              <a:rPr lang="en-US" sz="2250" dirty="0" spc="-3" kern="0">
+              <a:rPr lang="en-US" sz="2550" dirty="0" spc="-1" kern="0">
                 <a:solidFill>
                   <a:srgbClr val="E4E1D8"/>
                 </a:solidFill>
@@ -12271,7 +12216,7 @@
               <a:t>Pipeline</a:t>
             </a:r>
             <a:r>
-              <a:rPr lang="en-US" sz="2250" dirty="0" spc="5" kern="0">
+              <a:rPr lang="en-US" sz="2550" dirty="0" spc="0" kern="0">
                 <a:solidFill>
                   <a:srgbClr val="E4E1D8"/>
                 </a:solidFill>
@@ -12282,7 +12227,7 @@
               <a:t> có</a:t>
             </a:r>
             <a:r>
-              <a:rPr lang="en-US" sz="2250" dirty="0" spc="0" kern="0">
+              <a:rPr lang="en-US" sz="2550" dirty="0" spc="1" kern="0">
                 <a:solidFill>
                   <a:srgbClr val="E4E1D8"/>
                 </a:solidFill>
@@ -12293,7 +12238,7 @@
               <a:t> thể</a:t>
             </a:r>
             <a:r>
-              <a:rPr lang="en-US" sz="2250" dirty="0" spc="1" kern="0">
+              <a:rPr lang="en-US" sz="2550" dirty="0" spc="0" kern="0">
                 <a:solidFill>
                   <a:srgbClr val="E4E1D8"/>
                 </a:solidFill>
@@ -12301,10 +12246,10 @@
                 <a:ea typeface="Be Vietnam Pro" pitchFamily="34" charset="-122"/>
                 <a:cs typeface="Be Vietnam Pro" pitchFamily="34" charset="-120"/>
               </a:rPr>
-              <a:t> hỏng</a:t>
-            </a:r>
-            <a:r>
-              <a:rPr lang="en-US" sz="2250" dirty="0" spc="0" kern="0">
+              <a:t> hỏng khi cần</a:t>
+            </a:r>
+            <a:r>
+              <a:rPr lang="en-US" sz="2550" dirty="0" spc="-4" kern="0">
                 <a:solidFill>
                   <a:srgbClr val="E4E1D8"/>
                 </a:solidFill>
@@ -12312,10 +12257,10 @@
                 <a:ea typeface="Be Vietnam Pro" pitchFamily="34" charset="-122"/>
                 <a:cs typeface="Be Vietnam Pro" pitchFamily="34" charset="-120"/>
               </a:rPr>
-              <a:t> khi</a:t>
-            </a:r>
-            <a:r>
-              <a:rPr lang="en-US" sz="2250" dirty="0" spc="1" kern="0">
+              <a:t> việc</a:t>
+            </a:r>
+            <a:r>
+              <a:rPr lang="en-US" sz="2550" dirty="0" spc="1" kern="0">
                 <a:solidFill>
                   <a:srgbClr val="E4E1D8"/>
                 </a:solidFill>
@@ -12323,31 +12268,9 @@
                 <a:ea typeface="Be Vietnam Pro" pitchFamily="34" charset="-122"/>
                 <a:cs typeface="Be Vietnam Pro" pitchFamily="34" charset="-120"/>
               </a:rPr>
-              <a:t> cần</a:t>
-            </a:r>
-            <a:r>
-              <a:rPr lang="en-US" sz="2250" dirty="0" spc="-3" kern="0">
-                <a:solidFill>
-                  <a:srgbClr val="E4E1D8"/>
-                </a:solidFill>
-                <a:latin typeface="Be Vietnam Pro" pitchFamily="34" charset="0"/>
-                <a:ea typeface="Be Vietnam Pro" pitchFamily="34" charset="-122"/>
-                <a:cs typeface="Be Vietnam Pro" pitchFamily="34" charset="-120"/>
-              </a:rPr>
-              <a:t> việc</a:t>
-            </a:r>
-            <a:r>
-              <a:rPr lang="en-US" sz="2250" dirty="0" spc="1" kern="0">
-                <a:solidFill>
-                  <a:srgbClr val="E4E1D8"/>
-                </a:solidFill>
-                <a:latin typeface="Be Vietnam Pro" pitchFamily="34" charset="0"/>
-                <a:ea typeface="Be Vietnam Pro" pitchFamily="34" charset="-122"/>
-                <a:cs typeface="Be Vietnam Pro" pitchFamily="34" charset="-120"/>
-              </a:rPr>
               <a:t> mới.</a:t>
             </a:r>
-            <a:endParaRPr lang="en-US" sz="2250" dirty="0"/>
+            <a:endParaRPr lang="en-US" sz="2550" dirty="0"/>
           </a:p>
         </p:txBody>
       </p:sp>
@@ -12460,17 +12383,17 @@
           <a:ln/>
         </p:spPr>
         <p:txBody>
-          <a:bodyPr wrap="square" lIns="0" tIns="12144" rIns="0" bIns="-12144" rtlCol="0" anchor="t"/>
+          <a:bodyPr wrap="square" lIns="0" tIns="13764" rIns="0" bIns="-13764" rtlCol="0" anchor="t"/>
           <a:lstStyle/>
           <a:p>
             <a:pPr algn="l" indent="0" marL="0">
               <a:lnSpc>
-                <a:spcPts val="2925"/>
+                <a:spcPts val="3315"/>
               </a:lnSpc>
               <a:buNone/>
             </a:pPr>
             <a:r>
-              <a:rPr lang="en-US" sz="2250" dirty="0" spc="-2" kern="0">
+              <a:rPr lang="en-US" sz="2550" dirty="0" spc="-1" kern="0">
                 <a:solidFill>
                   <a:srgbClr val="E4E1D8"/>
                 </a:solidFill>
@@ -12481,7 +12404,7 @@
               <a:t>Mọi</a:t>
             </a:r>
             <a:r>
-              <a:rPr lang="en-US" sz="2250" dirty="0" spc="5" kern="0">
+              <a:rPr lang="en-US" sz="2550" dirty="0" spc="5" kern="0">
                 <a:solidFill>
                   <a:srgbClr val="E4E1D8"/>
                 </a:solidFill>
@@ -12492,7 +12415,7 @@
               <a:t> người</a:t>
             </a:r>
             <a:r>
-              <a:rPr lang="en-US" sz="2250" dirty="0" spc="-12" kern="0">
+              <a:rPr lang="en-US" sz="2550" dirty="0" spc="-10" kern="0">
                 <a:solidFill>
                   <a:srgbClr val="E4E1D8"/>
                 </a:solidFill>
@@ -12503,7 +12426,7 @@
               <a:t> mất</a:t>
             </a:r>
             <a:r>
-              <a:rPr lang="en-US" sz="2250" dirty="0" spc="0" kern="0">
+              <a:rPr lang="en-US" sz="2550" dirty="0" spc="0" kern="0">
                 <a:solidFill>
                   <a:srgbClr val="E4E1D8"/>
                 </a:solidFill>
@@ -12514,7 +12437,7 @@
               <a:t> tin</a:t>
             </a:r>
             <a:r>
-              <a:rPr lang="en-US" sz="2250" dirty="0" spc="-14" kern="0">
+              <a:rPr lang="en-US" sz="2550" dirty="0" spc="-14" kern="0">
                 <a:solidFill>
                   <a:srgbClr val="E4E1D8"/>
                 </a:solidFill>
@@ -12525,7 +12448,7 @@
               <a:t> vào</a:t>
             </a:r>
             <a:r>
-              <a:rPr lang="en-US" sz="2250" dirty="0" spc="-31" kern="0">
+              <a:rPr lang="en-US" sz="2550" dirty="0" spc="-33" kern="0">
                 <a:solidFill>
                   <a:srgbClr val="E4E1D8"/>
                 </a:solidFill>
@@ -12536,7 +12459,7 @@
               <a:t> kết</a:t>
             </a:r>
             <a:r>
-              <a:rPr lang="en-US" sz="2250" dirty="0" spc="1" kern="0">
+              <a:rPr lang="en-US" sz="2550" dirty="0" spc="1" kern="0">
                 <a:solidFill>
                   <a:srgbClr val="E4E1D8"/>
                 </a:solidFill>
@@ -12547,7 +12470,7 @@
               <a:t> quả</a:t>
             </a:r>
             <a:r>
-              <a:rPr lang="en-US" sz="2250" dirty="0" spc="16" kern="0">
+              <a:rPr lang="en-US" sz="2550" dirty="0" spc="14" kern="0">
                 <a:solidFill>
                   <a:srgbClr val="E4E1D8"/>
                 </a:solidFill>
@@ -12557,7 +12480,7 @@
               </a:rPr>
               <a:t> đỏ.</a:t>
             </a:r>
-            <a:endParaRPr lang="en-US" sz="2250" dirty="0"/>
+            <a:endParaRPr lang="en-US" sz="2550" dirty="0"/>
           </a:p>
         </p:txBody>
       </p:sp>
@@ -14959,7 +14882,7 @@
               <a:buNone/>
             </a:pPr>
             <a:r>
-              <a:rPr lang="en-US" sz="2400" b="1" dirty="0" spc="-2" kern="0">
+              <a:rPr lang="en-US" sz="2550" b="1" dirty="0" spc="-1" kern="0">
                 <a:solidFill>
                   <a:srgbClr val="14161C"/>
                 </a:solidFill>
@@ -14970,7 +14893,7 @@
               <a:t>Hủy</a:t>
             </a:r>
             <a:r>
-              <a:rPr lang="en-US" sz="2400" b="1" dirty="0" spc="12" kern="0">
+              <a:rPr lang="en-US" sz="2550" b="1" dirty="0" spc="11" kern="0">
                 <a:solidFill>
                   <a:srgbClr val="14161C"/>
                 </a:solidFill>
@@ -14981,7 +14904,7 @@
               <a:t> lượt</a:t>
             </a:r>
             <a:r>
-              <a:rPr lang="en-US" sz="2400" b="1" dirty="0" spc="1" kern="0">
+              <a:rPr lang="en-US" sz="2550" b="1" dirty="0" spc="0" kern="0">
                 <a:solidFill>
                   <a:srgbClr val="14161C"/>
                 </a:solidFill>
@@ -14989,10 +14912,10 @@
                 <a:ea typeface="Be Vietnam Pro" pitchFamily="34" charset="-122"/>
                 <a:cs typeface="Be Vietnam Pro" pitchFamily="34" charset="-120"/>
               </a:rPr>
-              <a:t> cũ:</a:t>
-            </a:r>
-            <a:r>
-              <a:rPr lang="en-US" sz="2400" b="1" dirty="0" spc="-1" kern="0">
+              <a:t> cũ: chỉ</a:t>
+            </a:r>
+            <a:r>
+              <a:rPr lang="en-US" sz="2550" b="1" dirty="0" spc="-2" kern="0">
                 <a:solidFill>
                   <a:srgbClr val="14161C"/>
                 </a:solidFill>
@@ -15000,10 +14923,10 @@
                 <a:ea typeface="Be Vietnam Pro" pitchFamily="34" charset="-122"/>
                 <a:cs typeface="Be Vietnam Pro" pitchFamily="34" charset="-120"/>
               </a:rPr>
-              <a:t> chỉ</a:t>
-            </a:r>
-            <a:r>
-              <a:rPr lang="en-US" sz="2400" b="1" dirty="0" spc="0" kern="0">
+              <a:t> hủy</a:t>
+            </a:r>
+            <a:r>
+              <a:rPr lang="en-US" sz="2550" b="1" dirty="0" spc="-9" kern="0">
                 <a:solidFill>
                   <a:srgbClr val="14161C"/>
                 </a:solidFill>
@@ -15011,10 +14934,10 @@
                 <a:ea typeface="Be Vietnam Pro" pitchFamily="34" charset="-122"/>
                 <a:cs typeface="Be Vietnam Pro" pitchFamily="34" charset="-120"/>
               </a:rPr>
-              <a:t> hủy</a:t>
-            </a:r>
-            <a:r>
-              <a:rPr lang="en-US" sz="2400" b="1" dirty="0" spc="-9" kern="0">
+              <a:t> với</a:t>
+            </a:r>
+            <a:r>
+              <a:rPr lang="en-US" sz="2550" b="1" dirty="0" spc="0" kern="0">
                 <a:solidFill>
                   <a:srgbClr val="14161C"/>
                 </a:solidFill>
@@ -15022,20 +14945,9 @@
                 <a:ea typeface="Be Vietnam Pro" pitchFamily="34" charset="-122"/>
                 <a:cs typeface="Be Vietnam Pro" pitchFamily="34" charset="-120"/>
               </a:rPr>
-              <a:t> với</a:t>
-            </a:r>
-            <a:r>
-              <a:rPr lang="en-US" sz="2400" b="1" dirty="0" spc="2" kern="0">
-                <a:solidFill>
-                  <a:srgbClr val="14161C"/>
-                </a:solidFill>
-                <a:latin typeface="Be Vietnam Pro" pitchFamily="34" charset="0"/>
-                <a:ea typeface="Be Vietnam Pro" pitchFamily="34" charset="-122"/>
-                <a:cs typeface="Be Vietnam Pro" pitchFamily="34" charset="-120"/>
-              </a:rPr>
               <a:t> PR.</a:t>
             </a:r>
-            <a:endParaRPr lang="en-US" sz="2400" dirty="0"/>
+            <a:endParaRPr lang="en-US" sz="2550" dirty="0"/>
           </a:p>
         </p:txBody>
       </p:sp>
@@ -15270,7 +15182,7 @@
               <a:buNone/>
             </a:pPr>
             <a:r>
-              <a:rPr lang="en-US" sz="2400" b="1" dirty="0" spc="-22" kern="0">
+              <a:rPr lang="en-US" sz="2550" b="1" dirty="0" spc="-21" kern="0">
                 <a:solidFill>
                   <a:srgbClr val="14161C"/>
                 </a:solidFill>
@@ -15281,7 +15193,7 @@
               <a:t>Quyền</a:t>
             </a:r>
             <a:r>
-              <a:rPr lang="en-US" sz="2400" b="1" dirty="0" spc="-3" kern="0">
+              <a:rPr lang="en-US" sz="2550" b="1" dirty="0" spc="-2" kern="0">
                 <a:solidFill>
                   <a:srgbClr val="14161C"/>
                 </a:solidFill>
@@ -15292,7 +15204,7 @@
               <a:t> tối</a:t>
             </a:r>
             <a:r>
-              <a:rPr lang="en-US" sz="2400" b="1" dirty="0" spc="-1" kern="0">
+              <a:rPr lang="en-US" sz="2550" b="1" dirty="0" spc="2" kern="0">
                 <a:solidFill>
                   <a:srgbClr val="14161C"/>
                 </a:solidFill>
@@ -15300,10 +15212,10 @@
                 <a:ea typeface="Be Vietnam Pro" pitchFamily="34" charset="-122"/>
                 <a:cs typeface="Be Vietnam Pro" pitchFamily="34" charset="-120"/>
               </a:rPr>
-              <a:t> thiểu: khai</a:t>
-            </a:r>
-            <a:r>
-              <a:rPr lang="en-US" sz="2400" b="1" dirty="0" spc="-3" kern="0">
+              <a:t> thiểu:</a:t>
+            </a:r>
+            <a:r>
+              <a:rPr lang="en-US" sz="2550" b="1" dirty="0" spc="0" kern="0">
                 <a:solidFill>
                   <a:srgbClr val="14161C"/>
                 </a:solidFill>
@@ -15311,10 +15223,21 @@
                 <a:ea typeface="Be Vietnam Pro" pitchFamily="34" charset="-122"/>
                 <a:cs typeface="Be Vietnam Pro" pitchFamily="34" charset="-120"/>
               </a:rPr>
+              <a:t> khai</a:t>
+            </a:r>
+            <a:r>
+              <a:rPr lang="en-US" sz="2550" b="1" dirty="0" spc="-5" kern="0">
+                <a:solidFill>
+                  <a:srgbClr val="14161C"/>
+                </a:solidFill>
+                <a:latin typeface="Be Vietnam Pro" pitchFamily="34" charset="0"/>
+                <a:ea typeface="Be Vietnam Pro" pitchFamily="34" charset="-122"/>
+                <a:cs typeface="Be Vietnam Pro" pitchFamily="34" charset="-120"/>
+              </a:rPr>
               <a:t> permissions</a:t>
             </a:r>
             <a:r>
-              <a:rPr lang="en-US" sz="2400" b="1" dirty="0" spc="5" kern="0">
+              <a:rPr lang="en-US" sz="2550" b="1" dirty="0" spc="4" kern="0">
                 <a:solidFill>
                   <a:srgbClr val="14161C"/>
                 </a:solidFill>
@@ -15325,7 +15248,7 @@
               <a:t> ở</a:t>
             </a:r>
             <a:r>
-              <a:rPr lang="en-US" sz="2400" b="1" dirty="0" spc="-15" kern="0">
+              <a:rPr lang="en-US" sz="2550" b="1" dirty="0" spc="-15" kern="0">
                 <a:solidFill>
                   <a:srgbClr val="14161C"/>
                 </a:solidFill>
@@ -15336,7 +15259,7 @@
               <a:t> workflow</a:t>
             </a:r>
             <a:r>
-              <a:rPr lang="en-US" sz="2400" b="1" dirty="0" spc="-1" kern="0">
+              <a:rPr lang="en-US" sz="2550" b="1" dirty="0" spc="-1" kern="0">
                 <a:solidFill>
                   <a:srgbClr val="14161C"/>
                 </a:solidFill>
@@ -15347,7 +15270,7 @@
               <a:t> hoặc</a:t>
             </a:r>
             <a:r>
-              <a:rPr lang="en-US" sz="2400" b="1" dirty="0" spc="-5" kern="0">
+              <a:rPr lang="en-US" sz="2550" b="1" dirty="0" spc="-4" kern="0">
                 <a:solidFill>
                   <a:srgbClr val="14161C"/>
                 </a:solidFill>
@@ -15357,7 +15280,7 @@
               </a:rPr>
               <a:t> job.</a:t>
             </a:r>
-            <a:endParaRPr lang="en-US" sz="2400" dirty="0"/>
+            <a:endParaRPr lang="en-US" sz="2550" dirty="0"/>
           </a:p>
         </p:txBody>
       </p:sp>
@@ -15537,7 +15460,7 @@
               <a:buNone/>
             </a:pPr>
             <a:r>
-              <a:rPr lang="en-US" sz="2400" b="1" dirty="0" spc="0" kern="0">
+              <a:rPr lang="en-US" sz="2550" b="1" dirty="0" spc="2" kern="0">
                 <a:solidFill>
                   <a:srgbClr val="14161C"/>
                 </a:solidFill>
@@ -15548,7 +15471,7 @@
               <a:t>OIDC:</a:t>
             </a:r>
             <a:r>
-              <a:rPr lang="en-US" sz="2400" b="1" dirty="0" spc="-24" kern="0">
+              <a:rPr lang="en-US" sz="2550" b="1" dirty="0" spc="-24" kern="0">
                 <a:solidFill>
                   <a:srgbClr val="14161C"/>
                 </a:solidFill>
@@ -15559,7 +15482,7 @@
               <a:t> token</a:t>
             </a:r>
             <a:r>
-              <a:rPr lang="en-US" sz="2400" b="1" dirty="0" spc="4" kern="0">
+              <a:rPr lang="en-US" sz="2550" b="1" dirty="0" spc="0" kern="0">
                 <a:solidFill>
                   <a:srgbClr val="14161C"/>
                 </a:solidFill>
@@ -15570,7 +15493,7 @@
               <a:t> từ</a:t>
             </a:r>
             <a:r>
-              <a:rPr lang="en-US" sz="2400" b="1" dirty="0" spc="-1" kern="0">
+              <a:rPr lang="en-US" sz="2550" b="1" dirty="0" spc="3" kern="0">
                 <a:solidFill>
                   <a:srgbClr val="14161C"/>
                 </a:solidFill>
@@ -15581,7 +15504,7 @@
               <a:t> GitHub</a:t>
             </a:r>
             <a:r>
-              <a:rPr lang="en-US" sz="2400" b="1" dirty="0" spc="7" kern="0">
+              <a:rPr lang="en-US" sz="2550" b="1" dirty="0" spc="5" kern="0">
                 <a:solidFill>
                   <a:srgbClr val="14161C"/>
                 </a:solidFill>
@@ -15592,7 +15515,7 @@
               <a:t> đổi</a:t>
             </a:r>
             <a:r>
-              <a:rPr lang="en-US" sz="2400" b="1" dirty="0" spc="-10" kern="0">
+              <a:rPr lang="en-US" sz="2550" b="1" dirty="0" spc="-13" kern="0">
                 <a:solidFill>
                   <a:srgbClr val="14161C"/>
                 </a:solidFill>
@@ -15603,7 +15526,7 @@
               <a:t> lấy</a:t>
             </a:r>
             <a:r>
-              <a:rPr lang="en-US" sz="2400" b="1" dirty="0" spc="-18" kern="0">
+              <a:rPr lang="en-US" sz="2550" b="1" dirty="0" spc="-17" kern="0">
                 <a:solidFill>
                   <a:srgbClr val="14161C"/>
                 </a:solidFill>
@@ -15614,7 +15537,7 @@
               <a:t> xác</a:t>
             </a:r>
             <a:r>
-              <a:rPr lang="en-US" sz="2400" b="1" dirty="0" spc="10" kern="0">
+              <a:rPr lang="en-US" sz="2550" b="1" dirty="0" spc="11" kern="0">
                 <a:solidFill>
                   <a:srgbClr val="14161C"/>
                 </a:solidFill>
@@ -15625,7 +15548,7 @@
               <a:t> thực</a:t>
             </a:r>
             <a:r>
-              <a:rPr lang="en-US" sz="2400" b="1" dirty="0" spc="-6" kern="0">
+              <a:rPr lang="en-US" sz="2550" b="1" dirty="0" spc="-4" kern="0">
                 <a:solidFill>
                   <a:srgbClr val="14161C"/>
                 </a:solidFill>
@@ -15636,7 +15559,7 @@
               <a:t> ngắn</a:t>
             </a:r>
             <a:r>
-              <a:rPr lang="en-US" sz="2400" b="1" dirty="0" spc="-1" kern="0">
+              <a:rPr lang="en-US" sz="2550" b="1" dirty="0" spc="0" kern="0">
                 <a:solidFill>
                   <a:srgbClr val="14161C"/>
                 </a:solidFill>
@@ -15646,7 +15569,7 @@
               </a:rPr>
               <a:t> hạn.</a:t>
             </a:r>
-            <a:endParaRPr lang="en-US" sz="2400" dirty="0"/>
+            <a:endParaRPr lang="en-US" sz="2550" dirty="0"/>
           </a:p>
         </p:txBody>
       </p:sp>
@@ -15870,7 +15793,7 @@
               <a:buNone/>
             </a:pPr>
             <a:r>
-              <a:rPr lang="en-US" sz="2400" b="1" dirty="0" spc="9" kern="0">
+              <a:rPr lang="en-US" sz="2550" b="1" dirty="0" spc="14" kern="0">
                 <a:solidFill>
                   <a:srgbClr val="14161C"/>
                 </a:solidFill>
@@ -15881,7 +15804,7 @@
               <a:t>Người</a:t>
             </a:r>
             <a:r>
-              <a:rPr lang="en-US" sz="2400" b="1" dirty="0" spc="-17" kern="0">
+              <a:rPr lang="en-US" sz="2550" b="1" dirty="0" spc="-17" kern="0">
                 <a:solidFill>
                   <a:srgbClr val="14161C"/>
                 </a:solidFill>
@@ -15892,7 +15815,7 @@
               <a:t> duyệt</a:t>
             </a:r>
             <a:r>
-              <a:rPr lang="en-US" sz="2400" b="1" dirty="0" spc="-5" kern="0">
+              <a:rPr lang="en-US" sz="2550" b="1" dirty="0" spc="-6" kern="0">
                 <a:solidFill>
                   <a:srgbClr val="14161C"/>
                 </a:solidFill>
@@ -15903,7 +15826,7 @@
               <a:t> bắt</a:t>
             </a:r>
             <a:r>
-              <a:rPr lang="en-US" sz="2400" b="1" dirty="0" spc="-2" kern="0">
+              <a:rPr lang="en-US" sz="2550" b="1" dirty="0" spc="-1" kern="0">
                 <a:solidFill>
                   <a:srgbClr val="14161C"/>
                 </a:solidFill>
@@ -15911,10 +15834,10 @@
                 <a:ea typeface="Be Vietnam Pro" pitchFamily="34" charset="-122"/>
                 <a:cs typeface="Be Vietnam Pro" pitchFamily="34" charset="-120"/>
               </a:rPr>
-              <a:t> buộc phụ thuộc</a:t>
-            </a:r>
-            <a:r>
-              <a:rPr lang="en-US" sz="2400" b="1" dirty="0" spc="-3" kern="0">
+              <a:t> buộc</a:t>
+            </a:r>
+            <a:r>
+              <a:rPr lang="en-US" sz="2550" b="1" dirty="0" spc="-4" kern="0">
                 <a:solidFill>
                   <a:srgbClr val="14161C"/>
                 </a:solidFill>
@@ -15922,9 +15845,31 @@
                 <a:ea typeface="Be Vietnam Pro" pitchFamily="34" charset="-122"/>
                 <a:cs typeface="Be Vietnam Pro" pitchFamily="34" charset="-120"/>
               </a:rPr>
+              <a:t> phụ</a:t>
+            </a:r>
+            <a:r>
+              <a:rPr lang="en-US" sz="2550" b="1" dirty="0" spc="-1" kern="0">
+                <a:solidFill>
+                  <a:srgbClr val="14161C"/>
+                </a:solidFill>
+                <a:latin typeface="Be Vietnam Pro" pitchFamily="34" charset="0"/>
+                <a:ea typeface="Be Vietnam Pro" pitchFamily="34" charset="-122"/>
+                <a:cs typeface="Be Vietnam Pro" pitchFamily="34" charset="-120"/>
+              </a:rPr>
+              <a:t> thuộc</a:t>
+            </a:r>
+            <a:r>
+              <a:rPr lang="en-US" sz="2550" b="1" dirty="0" spc="0" kern="0">
+                <a:solidFill>
+                  <a:srgbClr val="14161C"/>
+                </a:solidFill>
+                <a:latin typeface="Be Vietnam Pro" pitchFamily="34" charset="0"/>
+                <a:ea typeface="Be Vietnam Pro" pitchFamily="34" charset="-122"/>
+                <a:cs typeface="Be Vietnam Pro" pitchFamily="34" charset="-120"/>
+              </a:rPr>
               <a:t> gói.</a:t>
             </a:r>
-            <a:endParaRPr lang="en-US" sz="2400" dirty="0"/>
+            <a:endParaRPr lang="en-US" sz="2550" dirty="0"/>
           </a:p>
         </p:txBody>
       </p:sp>
@@ -16170,7 +16115,7 @@
               <a:buNone/>
             </a:pPr>
             <a:r>
-              <a:rPr lang="en-US" sz="2400" b="1" dirty="0" spc="-10" kern="0">
+              <a:rPr lang="en-US" sz="2550" b="1" dirty="0" spc="-11" kern="0">
                 <a:solidFill>
                   <a:srgbClr val="14161C"/>
                 </a:solidFill>
@@ -16181,7 +16126,7 @@
               <a:t>Branch</a:t>
             </a:r>
             <a:r>
-              <a:rPr lang="en-US" sz="2400" b="1" dirty="0" spc="-9" kern="0">
+              <a:rPr lang="en-US" sz="2550" b="1" dirty="0" spc="-9" kern="0">
                 <a:solidFill>
                   <a:srgbClr val="14161C"/>
                 </a:solidFill>
@@ -16192,7 +16137,7 @@
               <a:t> protection:</a:t>
             </a:r>
             <a:r>
-              <a:rPr lang="en-US" sz="2400" b="1" dirty="0" spc="3" kern="0">
+              <a:rPr lang="en-US" sz="2550" b="1" dirty="0" spc="1" kern="0">
                 <a:solidFill>
                   <a:srgbClr val="14161C"/>
                 </a:solidFill>
@@ -16203,7 +16148,7 @@
               <a:t> đặt</a:t>
             </a:r>
             <a:r>
-              <a:rPr lang="en-US" sz="2400" b="1" dirty="0" spc="0" kern="0">
+              <a:rPr lang="en-US" sz="2550" b="1" dirty="0" spc="2" kern="0">
                 <a:solidFill>
                   <a:srgbClr val="14161C"/>
                 </a:solidFill>
@@ -16214,7 +16159,7 @@
               <a:t> các</a:t>
             </a:r>
             <a:r>
-              <a:rPr lang="en-US" sz="2400" b="1" dirty="0" spc="-4" kern="0">
+              <a:rPr lang="en-US" sz="2550" b="1" dirty="0" spc="-2" kern="0">
                 <a:solidFill>
                   <a:srgbClr val="14161C"/>
                 </a:solidFill>
@@ -16225,7 +16170,7 @@
               <a:t> kiểm</a:t>
             </a:r>
             <a:r>
-              <a:rPr lang="en-US" sz="2400" b="1" dirty="0" spc="-10" kern="0">
+              <a:rPr lang="en-US" sz="2550" b="1" dirty="0" spc="-14" kern="0">
                 <a:solidFill>
                   <a:srgbClr val="14161C"/>
                 </a:solidFill>
@@ -16236,7 +16181,7 @@
               <a:t> tra</a:t>
             </a:r>
             <a:r>
-              <a:rPr lang="en-US" sz="2400" b="1" dirty="0" spc="-5" kern="0">
+              <a:rPr lang="en-US" sz="2550" b="1" dirty="0" spc="-6" kern="0">
                 <a:solidFill>
                   <a:srgbClr val="14161C"/>
                 </a:solidFill>
@@ -16247,7 +16192,7 @@
               <a:t> bắt</a:t>
             </a:r>
             <a:r>
-              <a:rPr lang="en-US" sz="2400" b="1" dirty="0" spc="-1" kern="0">
+              <a:rPr lang="en-US" sz="2550" b="1" dirty="0" spc="0" kern="0">
                 <a:solidFill>
                   <a:srgbClr val="14161C"/>
                 </a:solidFill>
@@ -16257,7 +16202,7 @@
               </a:rPr>
               <a:t> buộc.</a:t>
             </a:r>
-            <a:endParaRPr lang="en-US" sz="2400" dirty="0"/>
+            <a:endParaRPr lang="en-US" sz="2550" dirty="0"/>
           </a:p>
         </p:txBody>
       </p:sp>

--- a/system-design-101/vi/lessons/sd-13-027/slides/sd-13-027.pptx
+++ b/system-design-101/vi/lessons/sd-13-027/slides/sd-13-027.pptx
@@ -5726,6 +5726,17 @@
               <a:t> ·</a:t>
             </a:r>
             <a:r>
+              <a:rPr lang="en-US" sz="1950" b="1" spc="261" kern="0" dirty="0">
+                <a:solidFill>
+                  <a:srgbClr val="FF6A4D"/>
+                </a:solidFill>
+                <a:latin typeface="Be Vietnam Pro" pitchFamily="34" charset="0"/>
+                <a:ea typeface="Be Vietnam Pro" pitchFamily="34" charset="-122"/>
+                <a:cs typeface="Be Vietnam Pro" pitchFamily="34" charset="-120"/>
+              </a:rPr>
+              <a:t> CHẠY</a:t>
+            </a:r>
+            <a:r>
               <a:rPr lang="en-US" sz="1950" b="1" spc="300" kern="0" dirty="0">
                 <a:solidFill>
                   <a:srgbClr val="FF6A4D"/>
@@ -5737,7 +5748,7 @@
               <a:t> KHI</a:t>
             </a:r>
             <a:r>
-              <a:rPr lang="en-US" sz="1950" b="1" spc="283" kern="0" dirty="0">
+              <a:rPr lang="en-US" sz="1950" b="1" spc="286" kern="0" dirty="0">
                 <a:solidFill>
                   <a:srgbClr val="FF6A4D"/>
                 </a:solidFill>
@@ -5745,32 +5756,10 @@
                 <a:ea typeface="Be Vietnam Pro" pitchFamily="34" charset="-122"/>
                 <a:cs typeface="Be Vietnam Pro" pitchFamily="34" charset="-120"/>
               </a:rPr>
-              <a:t> NÀO</a:t>
-            </a:r>
-            <a:r>
-              <a:rPr lang="en-US" sz="1950" b="1" spc="268" kern="0" dirty="0">
-                <a:solidFill>
-                  <a:srgbClr val="FF6A4D"/>
-                </a:solidFill>
-                <a:latin typeface="Be Vietnam Pro" pitchFamily="34" charset="0"/>
-                <a:ea typeface="Be Vietnam Pro" pitchFamily="34" charset="-122"/>
-                <a:cs typeface="Be Vietnam Pro" pitchFamily="34" charset="-120"/>
-              </a:rPr>
-              <a:t> CHẠY,</a:t>
-            </a:r>
-            <a:r>
-              <a:rPr lang="en-US" sz="1950" b="1" spc="261" kern="0" dirty="0">
-                <a:solidFill>
-                  <a:srgbClr val="FF6A4D"/>
-                </a:solidFill>
-                <a:latin typeface="Be Vietnam Pro" pitchFamily="34" charset="0"/>
-                <a:ea typeface="Be Vietnam Pro" pitchFamily="34" charset="-122"/>
-                <a:cs typeface="Be Vietnam Pro" pitchFamily="34" charset="-120"/>
-              </a:rPr>
-              <a:t> CHẠY</a:t>
-            </a:r>
-            <a:r>
-              <a:rPr lang="en-US" sz="1950" b="1" spc="299" kern="0" dirty="0">
+              <a:t> NÀO,</a:t>
+            </a:r>
+            <a:r>
+              <a:rPr lang="en-US" sz="1950" b="1" spc="300" kern="0" dirty="0">
                 <a:solidFill>
                   <a:srgbClr val="FF6A4D"/>
                 </a:solidFill>
@@ -6528,11 +6517,11 @@
         <p:spPr>
           <a:xfrm>
             <a:off x="914400" y="7048500"/>
-            <a:ext cx="16459200" cy="1619250"/>
+            <a:ext cx="16459200" cy="1847850"/>
           </a:xfrm>
           <a:prstGeom prst="roundRect">
             <a:avLst>
-              <a:gd name="adj" fmla="val 14118"/>
+              <a:gd name="adj" fmla="val 12371"/>
             </a:avLst>
           </a:prstGeom>
           <a:solidFill>
@@ -6633,7 +6622,7 @@
         <p:spPr>
           <a:xfrm>
             <a:off x="1295400" y="7762875"/>
-            <a:ext cx="15811500" cy="762000"/>
+            <a:ext cx="15811500" cy="876300"/>
           </a:xfrm>
           <a:prstGeom prst="rect">
             <a:avLst/>
@@ -6739,8 +6728,17 @@
               </a:rPr>
               <a:t> lập.</a:t>
             </a:r>
-            <a:r>
-              <a:rPr lang="en-US" sz="2550" dirty="0" spc="-3" kern="0">
+            <a:endParaRPr lang="en-US" sz="2550" dirty="0"/>
+          </a:p>
+          <a:p>
+            <a:pPr algn="l" indent="0" marL="0">
+              <a:lnSpc>
+                <a:spcPts val="3315"/>
+              </a:lnSpc>
+              <a:buNone/>
+            </a:pPr>
+            <a:r>
+              <a:rPr lang="en-US" sz="2550" dirty="0" spc="-4" kern="0">
                 <a:solidFill>
                   <a:srgbClr val="E4E1D8"/>
                 </a:solidFill>
@@ -6748,7 +6746,7 @@
                 <a:ea typeface="Be Vietnam Pro" pitchFamily="34" charset="-122"/>
                 <a:cs typeface="Be Vietnam Pro" pitchFamily="34" charset="-120"/>
               </a:rPr>
-              <a:t> Giữ</a:t>
+              <a:t>Giữ</a:t>
             </a:r>
             <a:r>
               <a:rPr lang="en-US" sz="2550" dirty="0" spc="0" kern="0">
@@ -6773,7 +6771,7 @@
               <a:t> dưới</a:t>
             </a:r>
             <a:r>
-              <a:rPr lang="en-US" sz="2550" dirty="0" spc="-15" kern="0">
+              <a:rPr lang="en-US" sz="2550" dirty="0" spc="-14" kern="0">
                 <a:solidFill>
                   <a:srgbClr val="E4E1D8"/>
                 </a:solidFill>
@@ -7632,7 +7630,7 @@
                 <a:ea typeface="Be Vietnam Pro" pitchFamily="34" charset="-122"/>
                 <a:cs typeface="Be Vietnam Pro" pitchFamily="34" charset="-120"/>
               </a:rPr>
-              <a:t> job,</a:t>
+              <a:t> job;</a:t>
             </a:r>
             <a:r>
               <a:rPr lang="en-US" sz="2550" dirty="0" spc="1" kern="0">
@@ -7643,32 +7641,10 @@
                 <a:ea typeface="Be Vietnam Pro" pitchFamily="34" charset="-122"/>
                 <a:cs typeface="Be Vietnam Pro" pitchFamily="34" charset="-120"/>
               </a:rPr>
-              <a:t> chỉ</a:t>
+              <a:t> mở thêm</a:t>
             </a:r>
             <a:r>
               <a:rPr lang="en-US" sz="2550" dirty="0" spc="0" kern="0">
-                <a:solidFill>
-                  <a:srgbClr val="14161C"/>
-                </a:solidFill>
-                <a:latin typeface="Be Vietnam Pro" pitchFamily="34" charset="0"/>
-                <a:ea typeface="Be Vietnam Pro" pitchFamily="34" charset="-122"/>
-                <a:cs typeface="Be Vietnam Pro" pitchFamily="34" charset="-120"/>
-              </a:rPr>
-              <a:t> mở</a:t>
-            </a:r>
-            <a:r>
-              <a:rPr lang="en-US" sz="2550" dirty="0" spc="2" kern="0">
-                <a:solidFill>
-                  <a:srgbClr val="14161C"/>
-                </a:solidFill>
-                <a:latin typeface="Be Vietnam Pro" pitchFamily="34" charset="0"/>
-                <a:ea typeface="Be Vietnam Pro" pitchFamily="34" charset="-122"/>
-                <a:cs typeface="Be Vietnam Pro" pitchFamily="34" charset="-120"/>
-              </a:rPr>
-              <a:t> thêm</a:t>
-            </a:r>
-            <a:r>
-              <a:rPr lang="en-US" sz="2550" dirty="0" spc="-1" kern="0">
                 <a:solidFill>
                   <a:srgbClr val="14161C"/>
                 </a:solidFill>
@@ -8139,7 +8115,7 @@
               <a:t>Token</a:t>
             </a:r>
             <a:r>
-              <a:rPr lang="en-US" sz="2550" dirty="0" spc="-1" kern="0">
+              <a:rPr lang="en-US" sz="2550" dirty="0" spc="0" kern="0">
                 <a:solidFill>
                   <a:srgbClr val="14161C"/>
                 </a:solidFill>
@@ -8147,7 +8123,40 @@
                 <a:ea typeface="Be Vietnam Pro" pitchFamily="34" charset="-122"/>
                 <a:cs typeface="Be Vietnam Pro" pitchFamily="34" charset="-120"/>
               </a:rPr>
-              <a:t> từ</a:t>
+              <a:t> GitHub</a:t>
+            </a:r>
+            <a:r>
+              <a:rPr lang="en-US" sz="2550" dirty="0" spc="12" kern="0">
+                <a:solidFill>
+                  <a:srgbClr val="14161C"/>
+                </a:solidFill>
+                <a:latin typeface="Be Vietnam Pro" pitchFamily="34" charset="0"/>
+                <a:ea typeface="Be Vietnam Pro" pitchFamily="34" charset="-122"/>
+                <a:cs typeface="Be Vietnam Pro" pitchFamily="34" charset="-120"/>
+              </a:rPr>
+              <a:t> đổi</a:t>
+            </a:r>
+            <a:r>
+              <a:rPr lang="en-US" sz="2550" dirty="0" spc="-10" kern="0">
+                <a:solidFill>
+                  <a:srgbClr val="14161C"/>
+                </a:solidFill>
+                <a:latin typeface="Be Vietnam Pro" pitchFamily="34" charset="0"/>
+                <a:ea typeface="Be Vietnam Pro" pitchFamily="34" charset="-122"/>
+                <a:cs typeface="Be Vietnam Pro" pitchFamily="34" charset="-120"/>
+              </a:rPr>
+              <a:t> lấy</a:t>
+            </a:r>
+            <a:r>
+              <a:rPr lang="en-US" sz="2550" dirty="0" spc="1" kern="0">
+                <a:solidFill>
+                  <a:srgbClr val="14161C"/>
+                </a:solidFill>
+                <a:latin typeface="Be Vietnam Pro" pitchFamily="34" charset="0"/>
+                <a:ea typeface="Be Vietnam Pro" pitchFamily="34" charset="-122"/>
+                <a:cs typeface="Be Vietnam Pro" pitchFamily="34" charset="-120"/>
+              </a:rPr>
+              <a:t> thông</a:t>
             </a:r>
             <a:r>
               <a:rPr lang="en-US" sz="2550" dirty="0" spc="0" kern="0">
@@ -8158,43 +8167,10 @@
                 <a:ea typeface="Be Vietnam Pro" pitchFamily="34" charset="-122"/>
                 <a:cs typeface="Be Vietnam Pro" pitchFamily="34" charset="-120"/>
               </a:rPr>
-              <a:t> GitHub</a:t>
-            </a:r>
-            <a:r>
-              <a:rPr lang="en-US" sz="2550" dirty="0" spc="12" kern="0">
-                <a:solidFill>
-                  <a:srgbClr val="14161C"/>
-                </a:solidFill>
-                <a:latin typeface="Be Vietnam Pro" pitchFamily="34" charset="0"/>
-                <a:ea typeface="Be Vietnam Pro" pitchFamily="34" charset="-122"/>
-                <a:cs typeface="Be Vietnam Pro" pitchFamily="34" charset="-120"/>
-              </a:rPr>
-              <a:t> đổi</a:t>
-            </a:r>
-            <a:r>
-              <a:rPr lang="en-US" sz="2550" dirty="0" spc="-9" kern="0">
-                <a:solidFill>
-                  <a:srgbClr val="14161C"/>
-                </a:solidFill>
-                <a:latin typeface="Be Vietnam Pro" pitchFamily="34" charset="0"/>
-                <a:ea typeface="Be Vietnam Pro" pitchFamily="34" charset="-122"/>
-                <a:cs typeface="Be Vietnam Pro" pitchFamily="34" charset="-120"/>
-              </a:rPr>
-              <a:t> lấy</a:t>
-            </a:r>
-            <a:r>
-              <a:rPr lang="en-US" sz="2550" dirty="0" spc="0" kern="0">
-                <a:solidFill>
-                  <a:srgbClr val="14161C"/>
-                </a:solidFill>
-                <a:latin typeface="Be Vietnam Pro" pitchFamily="34" charset="0"/>
-                <a:ea typeface="Be Vietnam Pro" pitchFamily="34" charset="-122"/>
-                <a:cs typeface="Be Vietnam Pro" pitchFamily="34" charset="-120"/>
-              </a:rPr>
-              <a:t> thông tin</a:t>
-            </a:r>
-            <a:r>
-              <a:rPr lang="en-US" sz="2550" dirty="0" spc="-18" kern="0">
+              <a:t> tin</a:t>
+            </a:r>
+            <a:r>
+              <a:rPr lang="en-US" sz="2550" dirty="0" spc="-19" kern="0">
                 <a:solidFill>
                   <a:srgbClr val="14161C"/>
                 </a:solidFill>
@@ -9558,7 +9534,7 @@
               <a:t> cần</a:t>
             </a:r>
             <a:r>
-              <a:rPr lang="en-US" sz="2550" dirty="0" spc="-5" kern="0">
+              <a:rPr lang="en-US" sz="2550" dirty="0" spc="-1" kern="0">
                 <a:solidFill>
                   <a:srgbClr val="9AA0B5"/>
                 </a:solidFill>
@@ -9566,10 +9542,10 @@
                 <a:ea typeface="Be Vietnam Pro" pitchFamily="34" charset="-122"/>
                 <a:cs typeface="Be Vietnam Pro" pitchFamily="34" charset="-120"/>
               </a:rPr>
-              <a:t> một</a:t>
-            </a:r>
-            <a:r>
-              <a:rPr lang="en-US" sz="2550" dirty="0" spc="-1" kern="0">
+              <a:t> cơ</a:t>
+            </a:r>
+            <a:r>
+              <a:rPr lang="en-US" sz="2550" dirty="0" spc="1" kern="0">
                 <a:solidFill>
                   <a:srgbClr val="9AA0B5"/>
                 </a:solidFill>
@@ -9577,40 +9553,7 @@
                 <a:ea typeface="Be Vietnam Pro" pitchFamily="34" charset="-122"/>
                 <a:cs typeface="Be Vietnam Pro" pitchFamily="34" charset="-120"/>
               </a:rPr>
-              <a:t> cơ</a:t>
-            </a:r>
-            <a:r>
-              <a:rPr lang="en-US" sz="2550" dirty="0" spc="1" kern="0">
-                <a:solidFill>
-                  <a:srgbClr val="9AA0B5"/>
-                </a:solidFill>
-                <a:latin typeface="Be Vietnam Pro" pitchFamily="34" charset="0"/>
-                <a:ea typeface="Be Vietnam Pro" pitchFamily="34" charset="-122"/>
-                <a:cs typeface="Be Vietnam Pro" pitchFamily="34" charset="-120"/>
-              </a:rPr>
-              <a:t> chế</a:t>
-            </a:r>
-            <a:r>
-              <a:rPr lang="en-US" sz="2550" dirty="0" spc="-18" kern="0">
-                <a:solidFill>
-                  <a:srgbClr val="9AA0B5"/>
-                </a:solidFill>
-                <a:latin typeface="Be Vietnam Pro" pitchFamily="34" charset="0"/>
-                <a:ea typeface="Be Vietnam Pro" pitchFamily="34" charset="-122"/>
-                <a:cs typeface="Be Vietnam Pro" pitchFamily="34" charset="-120"/>
-              </a:rPr>
-              <a:t> duyệt</a:t>
-            </a:r>
-            <a:r>
-              <a:rPr lang="en-US" sz="2550" dirty="0" spc="2" kern="0">
-                <a:solidFill>
-                  <a:srgbClr val="9AA0B5"/>
-                </a:solidFill>
-                <a:latin typeface="Be Vietnam Pro" pitchFamily="34" charset="0"/>
-                <a:ea typeface="Be Vietnam Pro" pitchFamily="34" charset="-122"/>
-                <a:cs typeface="Be Vietnam Pro" pitchFamily="34" charset="-120"/>
-              </a:rPr>
-              <a:t> khác.</a:t>
+              <a:t> chế khác.</a:t>
             </a:r>
             <a:endParaRPr lang="en-US" sz="2550" dirty="0"/>
           </a:p>
@@ -11621,7 +11564,7 @@
                 <a:ea typeface="Be Vietnam Pro" pitchFamily="34" charset="-122"/>
                 <a:cs typeface="Be Vietnam Pro" pitchFamily="34" charset="-120"/>
               </a:rPr>
-              <a:t> minh các</a:t>
+              <a:t> minh</a:t>
             </a:r>
             <a:r>
               <a:rPr lang="en-US" sz="2700" b="1" dirty="0" spc="-3" kern="0">
@@ -11635,7 +11578,7 @@
               <a:t> kiểm</a:t>
             </a:r>
             <a:r>
-              <a:rPr lang="en-US" sz="2700" b="1" dirty="0" spc="-18" kern="0">
+              <a:rPr lang="en-US" sz="2700" b="1" dirty="0" spc="-17" kern="0">
                 <a:solidFill>
                   <a:srgbClr val="F3EEE3"/>
                 </a:solidFill>
@@ -11646,7 +11589,7 @@
               <a:t> tra</a:t>
             </a:r>
             <a:r>
-              <a:rPr lang="en-US" sz="2700" b="1" dirty="0" spc="6" kern="0">
+              <a:rPr lang="en-US" sz="2700" b="1" dirty="0" spc="5" kern="0">
                 <a:solidFill>
                   <a:srgbClr val="F3EEE3"/>
                 </a:solidFill>
@@ -11666,17 +11609,6 @@
                 <a:cs typeface="Be Vietnam Pro" pitchFamily="34" charset="-120"/>
               </a:rPr>
               <a:t> viết</a:t>
-            </a:r>
-            <a:r>
-              <a:rPr lang="en-US" sz="2700" b="1" dirty="0" spc="5" kern="0">
-                <a:solidFill>
-                  <a:srgbClr val="F3EEE3"/>
-                </a:solidFill>
-                <a:latin typeface="Be Vietnam Pro" pitchFamily="34" charset="0"/>
-                <a:ea typeface="Be Vietnam Pro" pitchFamily="34" charset="-122"/>
-                <a:cs typeface="Be Vietnam Pro" pitchFamily="34" charset="-120"/>
-              </a:rPr>
-              <a:t> đều</a:t>
             </a:r>
             <a:r>
               <a:rPr lang="en-US" sz="2700" b="1" dirty="0" spc="1" kern="0">
@@ -14077,7 +14009,7 @@
               <a:t> tư</a:t>
             </a:r>
             <a:r>
-              <a:rPr lang="en-US" sz="1950" dirty="0" spc="-3" kern="0">
+              <a:rPr lang="en-US" sz="1950" dirty="0" spc="10" kern="0">
                 <a:solidFill>
                   <a:srgbClr val="6B6A66"/>
                 </a:solidFill>
@@ -14085,10 +14017,10 @@
                 <a:ea typeface="Be Vietnam Pro" pitchFamily="34" charset="-122"/>
                 <a:cs typeface="Be Vietnam Pro" pitchFamily="34" charset="-120"/>
               </a:rPr>
-              <a:t> có</a:t>
-            </a:r>
-            <a:r>
-              <a:rPr lang="en-US" sz="1950" dirty="0" spc="-2" kern="0">
+              <a:t> đổi</a:t>
+            </a:r>
+            <a:r>
+              <a:rPr lang="en-US" sz="1950" dirty="0" spc="4" kern="0">
                 <a:solidFill>
                   <a:srgbClr val="6B6A66"/>
                 </a:solidFill>
@@ -14096,10 +14028,10 @@
                 <a:ea typeface="Be Vietnam Pro" pitchFamily="34" charset="-122"/>
                 <a:cs typeface="Be Vietnam Pro" pitchFamily="34" charset="-120"/>
               </a:rPr>
-              <a:t> thể</a:t>
-            </a:r>
-            <a:r>
-              <a:rPr lang="en-US" sz="1950" dirty="0" spc="10" kern="0">
+              <a:t> được</a:t>
+            </a:r>
+            <a:r>
+              <a:rPr lang="en-US" sz="1950" dirty="0" spc="-1" kern="0">
                 <a:solidFill>
                   <a:srgbClr val="6B6A66"/>
                 </a:solidFill>
@@ -14107,7 +14039,29 @@
                 <a:ea typeface="Be Vietnam Pro" pitchFamily="34" charset="-122"/>
                 <a:cs typeface="Be Vietnam Pro" pitchFamily="34" charset="-120"/>
               </a:rPr>
-              <a:t> đổi</a:t>
+              <a:t> mặc</a:t>
+            </a:r>
+            <a:r>
+              <a:rPr lang="en-US" sz="1950" dirty="0" spc="17" kern="0">
+                <a:solidFill>
+                  <a:srgbClr val="6B6A66"/>
+                </a:solidFill>
+                <a:latin typeface="Be Vietnam Pro" pitchFamily="34" charset="0"/>
+                <a:ea typeface="Be Vietnam Pro" pitchFamily="34" charset="-122"/>
+                <a:cs typeface="Be Vietnam Pro" pitchFamily="34" charset="-120"/>
+              </a:rPr>
+              <a:t> định</a:t>
+            </a:r>
+            <a:r>
+              <a:rPr lang="en-US" sz="1950" dirty="0" spc="-12" kern="0">
+                <a:solidFill>
+                  <a:srgbClr val="6B6A66"/>
+                </a:solidFill>
+                <a:latin typeface="Be Vietnam Pro" pitchFamily="34" charset="0"/>
+                <a:ea typeface="Be Vietnam Pro" pitchFamily="34" charset="-122"/>
+                <a:cs typeface="Be Vietnam Pro" pitchFamily="34" charset="-120"/>
+              </a:rPr>
+              <a:t> trong</a:t>
             </a:r>
             <a:r>
               <a:rPr lang="en-US" sz="1950" dirty="0" spc="-1" kern="0">
@@ -14118,54 +14072,10 @@
                 <a:ea typeface="Be Vietnam Pro" pitchFamily="34" charset="-122"/>
                 <a:cs typeface="Be Vietnam Pro" pitchFamily="34" charset="-120"/>
               </a:rPr>
-              <a:t> mặc</a:t>
-            </a:r>
-            <a:r>
-              <a:rPr lang="en-US" sz="1950" dirty="0" spc="17" kern="0">
-                <a:solidFill>
-                  <a:srgbClr val="6B6A66"/>
-                </a:solidFill>
-                <a:latin typeface="Be Vietnam Pro" pitchFamily="34" charset="0"/>
-                <a:ea typeface="Be Vietnam Pro" pitchFamily="34" charset="-122"/>
-                <a:cs typeface="Be Vietnam Pro" pitchFamily="34" charset="-120"/>
-              </a:rPr>
-              <a:t> định</a:t>
-            </a:r>
-            <a:r>
-              <a:rPr lang="en-US" sz="1950" dirty="0" spc="-7" kern="0">
-                <a:solidFill>
-                  <a:srgbClr val="6B6A66"/>
-                </a:solidFill>
-                <a:latin typeface="Be Vietnam Pro" pitchFamily="34" charset="0"/>
-                <a:ea typeface="Be Vietnam Pro" pitchFamily="34" charset="-122"/>
-                <a:cs typeface="Be Vietnam Pro" pitchFamily="34" charset="-120"/>
-              </a:rPr>
-              <a:t> này</a:t>
-            </a:r>
-            <a:r>
-              <a:rPr lang="en-US" sz="1950" dirty="0" spc="-11" kern="0">
-                <a:solidFill>
-                  <a:srgbClr val="6B6A66"/>
-                </a:solidFill>
-                <a:latin typeface="Be Vietnam Pro" pitchFamily="34" charset="0"/>
-                <a:ea typeface="Be Vietnam Pro" pitchFamily="34" charset="-122"/>
-                <a:cs typeface="Be Vietnam Pro" pitchFamily="34" charset="-120"/>
-              </a:rPr>
-              <a:t> trong</a:t>
-            </a:r>
-            <a:r>
-              <a:rPr lang="en-US" sz="1950" dirty="0" spc="-2" kern="0">
-                <a:solidFill>
-                  <a:srgbClr val="6B6A66"/>
-                </a:solidFill>
-                <a:latin typeface="Be Vietnam Pro" pitchFamily="34" charset="0"/>
-                <a:ea typeface="Be Vietnam Pro" pitchFamily="34" charset="-122"/>
-                <a:cs typeface="Be Vietnam Pro" pitchFamily="34" charset="-120"/>
-              </a:rPr>
               <a:t> cài</a:t>
             </a:r>
             <a:r>
-              <a:rPr lang="en-US" sz="1950" dirty="0" spc="-1" kern="0">
+              <a:rPr lang="en-US" sz="1950" dirty="0" spc="0" kern="0">
                 <a:solidFill>
                   <a:srgbClr val="6B6A66"/>
                 </a:solidFill>
@@ -15964,7 +15874,7 @@
               <a:t> dùng</a:t>
             </a:r>
             <a:r>
-              <a:rPr lang="en-US" sz="1950" dirty="0" spc="4" kern="0">
+              <a:rPr lang="en-US" sz="1950" dirty="0" spc="-2" kern="0">
                 <a:solidFill>
                   <a:srgbClr val="6B6A66"/>
                 </a:solidFill>
@@ -15972,7 +15882,7 @@
                 <a:ea typeface="Be Vietnam Pro" pitchFamily="34" charset="-122"/>
                 <a:cs typeface="Be Vietnam Pro" pitchFamily="34" charset="-120"/>
               </a:rPr>
-              <a:t> được</a:t>
+              <a:t> ở</a:t>
             </a:r>
             <a:r>
               <a:rPr lang="en-US" sz="1950" dirty="0" spc="-1" kern="0">
@@ -15983,32 +15893,21 @@
                 <a:ea typeface="Be Vietnam Pro" pitchFamily="34" charset="-122"/>
                 <a:cs typeface="Be Vietnam Pro" pitchFamily="34" charset="-120"/>
               </a:rPr>
-              <a:t> ở</a:t>
+              <a:t> kho</a:t>
+            </a:r>
+            <a:r>
+              <a:rPr lang="en-US" sz="1950" dirty="0" spc="0" kern="0">
+                <a:solidFill>
+                  <a:srgbClr val="6B6A66"/>
+                </a:solidFill>
+                <a:latin typeface="Be Vietnam Pro" pitchFamily="34" charset="0"/>
+                <a:ea typeface="Be Vietnam Pro" pitchFamily="34" charset="-122"/>
+                <a:cs typeface="Be Vietnam Pro" pitchFamily="34" charset="-120"/>
+              </a:rPr>
+              <a:t> công</a:t>
             </a:r>
             <a:r>
               <a:rPr lang="en-US" sz="1950" dirty="0" spc="-2" kern="0">
-                <a:solidFill>
-                  <a:srgbClr val="6B6A66"/>
-                </a:solidFill>
-                <a:latin typeface="Be Vietnam Pro" pitchFamily="34" charset="0"/>
-                <a:ea typeface="Be Vietnam Pro" pitchFamily="34" charset="-122"/>
-                <a:cs typeface="Be Vietnam Pro" pitchFamily="34" charset="-120"/>
-              </a:rPr>
-              <a:t> kho</a:t>
-            </a:r>
-            <a:r>
-              <a:rPr lang="en-US" sz="1950" dirty="0" spc="0" kern="0">
-                <a:solidFill>
-                  <a:srgbClr val="6B6A66"/>
-                </a:solidFill>
-                <a:latin typeface="Be Vietnam Pro" pitchFamily="34" charset="0"/>
-                <a:ea typeface="Be Vietnam Pro" pitchFamily="34" charset="-122"/>
-                <a:cs typeface="Be Vietnam Pro" pitchFamily="34" charset="-120"/>
-              </a:rPr>
-              <a:t> công</a:t>
-            </a:r>
-            <a:r>
-              <a:rPr lang="en-US" sz="1950" dirty="0" spc="-1" kern="0">
                 <a:solidFill>
                   <a:srgbClr val="6B6A66"/>
                 </a:solidFill>

--- a/system-design-101/vi/lessons/sd-13-027/slides/sd-13-027.pptx
+++ b/system-design-101/vi/lessons/sd-13-027/slides/sd-13-027.pptx
@@ -30,11 +30,6 @@
     <p:embeddedFont>
       <p:font typeface="Bricolage Grotesque ExtraBold"/>
       <p:regular r:id="rId18"/>
-    </p:embeddedFont>
-    <p:embeddedFont>
-      <p:font typeface="JetBrains Mono"/>
-      <p:regular r:id="rId20"/>
-      <p:bold r:id="rId21"/>
     </p:embeddedFont>
   </p:embeddedFontLst>
   <p:defaultTextStyle>
@@ -3151,13 +3146,13 @@
               <a:buNone/>
             </a:pPr>
             <a:r>
-              <a:rPr lang="en-US" sz="2550" b="1" dirty="0" spc="5" kern="0">
+              <a:rPr lang="en-US" sz="2550" b="1" dirty="0" spc="2" kern="0">
                 <a:solidFill>
                   <a:srgbClr val="FF6A4D"/>
                 </a:solidFill>
-                <a:latin typeface="JetBrains Mono" pitchFamily="34" charset="0"/>
-                <a:ea typeface="JetBrains Mono" pitchFamily="34" charset="-122"/>
-                <a:cs typeface="JetBrains Mono" pitchFamily="34" charset="-120"/>
+                <a:latin typeface="Be Vietnam Pro" pitchFamily="34" charset="0"/>
+                <a:ea typeface="Be Vietnam Pro" pitchFamily="34" charset="-122"/>
+                <a:cs typeface="Be Vietnam Pro" pitchFamily="34" charset="-120"/>
               </a:rPr>
               <a:t>CI</a:t>
             </a:r>
@@ -3303,13 +3298,13 @@
               <a:buNone/>
             </a:pPr>
             <a:r>
-              <a:rPr lang="en-US" sz="2550" b="1" dirty="0" spc="5" kern="0">
+              <a:rPr lang="en-US" sz="2550" b="1" dirty="0" spc="2" kern="0">
                 <a:solidFill>
                   <a:srgbClr val="7C93FF"/>
                 </a:solidFill>
-                <a:latin typeface="JetBrains Mono" pitchFamily="34" charset="0"/>
-                <a:ea typeface="JetBrains Mono" pitchFamily="34" charset="-122"/>
-                <a:cs typeface="JetBrains Mono" pitchFamily="34" charset="-120"/>
+                <a:latin typeface="Be Vietnam Pro" pitchFamily="34" charset="0"/>
+                <a:ea typeface="Be Vietnam Pro" pitchFamily="34" charset="-122"/>
+                <a:cs typeface="Be Vietnam Pro" pitchFamily="34" charset="-120"/>
               </a:rPr>
               <a:t>CD</a:t>
             </a:r>
@@ -3455,13 +3450,13 @@
               <a:buNone/>
             </a:pPr>
             <a:r>
-              <a:rPr lang="en-US" sz="2550" b="1" dirty="0" spc="5" kern="0">
+              <a:rPr lang="en-US" sz="2550" b="1" dirty="0" spc="-1" kern="0">
                 <a:solidFill>
                   <a:srgbClr val="FFB454"/>
                 </a:solidFill>
-                <a:latin typeface="JetBrains Mono" pitchFamily="34" charset="0"/>
-                <a:ea typeface="JetBrains Mono" pitchFamily="34" charset="-122"/>
-                <a:cs typeface="JetBrains Mono" pitchFamily="34" charset="-120"/>
+                <a:latin typeface="Be Vietnam Pro" pitchFamily="34" charset="0"/>
+                <a:ea typeface="Be Vietnam Pro" pitchFamily="34" charset="-122"/>
+                <a:cs typeface="Be Vietnam Pro" pitchFamily="34" charset="-120"/>
               </a:rPr>
               <a:t>PR</a:t>
             </a:r>
@@ -3618,13 +3613,13 @@
               <a:buNone/>
             </a:pPr>
             <a:r>
-              <a:rPr lang="en-US" sz="2550" b="1" dirty="0" spc="5" kern="0">
+              <a:rPr lang="en-US" sz="2550" b="1" dirty="0" spc="1" kern="0">
                 <a:solidFill>
                   <a:srgbClr val="3DD6A0"/>
                 </a:solidFill>
-                <a:latin typeface="JetBrains Mono" pitchFamily="34" charset="0"/>
-                <a:ea typeface="JetBrains Mono" pitchFamily="34" charset="-122"/>
-                <a:cs typeface="JetBrains Mono" pitchFamily="34" charset="-120"/>
+                <a:latin typeface="Be Vietnam Pro" pitchFamily="34" charset="0"/>
+                <a:ea typeface="Be Vietnam Pro" pitchFamily="34" charset="-122"/>
+                <a:cs typeface="Be Vietnam Pro" pitchFamily="34" charset="-120"/>
               </a:rPr>
               <a:t>OIDC</a:t>
             </a:r>
@@ -3814,13 +3809,13 @@
               <a:buNone/>
             </a:pPr>
             <a:r>
-              <a:rPr lang="en-US" sz="2550" b="1" dirty="0" spc="5" kern="0">
+              <a:rPr lang="en-US" sz="2550" b="1" dirty="0" spc="-3" kern="0">
                 <a:solidFill>
                   <a:srgbClr val="E4E1D8"/>
                 </a:solidFill>
-                <a:latin typeface="JetBrains Mono" pitchFamily="34" charset="0"/>
-                <a:ea typeface="JetBrains Mono" pitchFamily="34" charset="-122"/>
-                <a:cs typeface="JetBrains Mono" pitchFamily="34" charset="-120"/>
+                <a:latin typeface="Be Vietnam Pro" pitchFamily="34" charset="0"/>
+                <a:ea typeface="Be Vietnam Pro" pitchFamily="34" charset="-122"/>
+                <a:cs typeface="Be Vietnam Pro" pitchFamily="34" charset="-120"/>
               </a:rPr>
               <a:t>OpenID</a:t>
             </a:r>
@@ -7564,13 +7559,13 @@
               <a:buNone/>
             </a:pPr>
             <a:r>
-              <a:rPr lang="en-US" sz="2550" dirty="0" spc="5" kern="0">
+              <a:rPr lang="en-US" sz="2550" dirty="0" spc="-3" kern="0">
                 <a:solidFill>
                   <a:srgbClr val="14161C"/>
                 </a:solidFill>
-                <a:latin typeface="JetBrains Mono" pitchFamily="34" charset="0"/>
-                <a:ea typeface="JetBrains Mono" pitchFamily="34" charset="-122"/>
-                <a:cs typeface="JetBrains Mono" pitchFamily="34" charset="-120"/>
+                <a:latin typeface="Be Vietnam Pro" pitchFamily="34" charset="0"/>
+                <a:ea typeface="Be Vietnam Pro" pitchFamily="34" charset="-122"/>
+                <a:cs typeface="Be Vietnam Pro" pitchFamily="34" charset="-120"/>
               </a:rPr>
               <a:t>permissions</a:t>
             </a:r>
@@ -13493,13 +13488,13 @@
               <a:buNone/>
             </a:pPr>
             <a:r>
-              <a:rPr lang="en-US" sz="2100" b="1" dirty="0" spc="-3" kern="0">
+              <a:rPr lang="en-US" sz="2100" b="1" dirty="0" spc="-7" kern="0">
                 <a:solidFill>
                   <a:srgbClr val="14161C"/>
                 </a:solidFill>
-                <a:latin typeface="JetBrains Mono" pitchFamily="34" charset="0"/>
-                <a:ea typeface="JetBrains Mono" pitchFamily="34" charset="-122"/>
-                <a:cs typeface="JetBrains Mono" pitchFamily="34" charset="-120"/>
+                <a:latin typeface="Be Vietnam Pro" pitchFamily="34" charset="0"/>
+                <a:ea typeface="Be Vietnam Pro" pitchFamily="34" charset="-122"/>
+                <a:cs typeface="Be Vietnam Pro" pitchFamily="34" charset="-120"/>
               </a:rPr>
               <a:t>pull_request</a:t>
             </a:r>
@@ -13732,13 +13727,13 @@
               <a:buNone/>
             </a:pPr>
             <a:r>
-              <a:rPr lang="en-US" sz="2100" b="1" dirty="0" spc="-3" kern="0">
+              <a:rPr lang="en-US" sz="2100" b="1" dirty="0" spc="-11" kern="0">
                 <a:solidFill>
                   <a:srgbClr val="B45309"/>
                 </a:solidFill>
-                <a:latin typeface="JetBrains Mono" pitchFamily="34" charset="0"/>
-                <a:ea typeface="JetBrains Mono" pitchFamily="34" charset="-122"/>
-                <a:cs typeface="JetBrains Mono" pitchFamily="34" charset="-120"/>
+                <a:latin typeface="Be Vietnam Pro" pitchFamily="34" charset="0"/>
+                <a:ea typeface="Be Vietnam Pro" pitchFamily="34" charset="-122"/>
+                <a:cs typeface="Be Vietnam Pro" pitchFamily="34" charset="-120"/>
               </a:rPr>
               <a:t>pull_request_target</a:t>
             </a:r>
